--- a/Informática Aplicada a Aeronáutica/Slides/Slides_Aula_01_Hardware_e_Estacoes_de_Trabalho.pptx
+++ b/Informática Aplicada a Aeronáutica/Slides/Slides_Aula_01_Hardware_e_Estacoes_de_Trabalho.pptx
@@ -16,8 +16,9 @@
     <p:sldId id="264" r:id="rId15"/>
     <p:sldId id="265" r:id="rId16"/>
     <p:sldId id="266" r:id="rId17"/>
+    <p:sldId id="267" r:id="rId18"/>
   </p:sldIdLst>
-  <p:sldSz cx="12191695" cy="6858000" type="screen4x3"/>
+  <p:sldSz cx="9144000" cy="5143500" type="screen4x3"/>
   <p:notesSz cx="6858000" cy="9144000"/>
   <p:defaultTextStyle>
     <a:defPPr>
@@ -3107,13 +3108,13 @@
         <p:spPr>
           <a:xfrm>
             <a:off x="0" y="0"/>
-            <a:ext cx="12191695" cy="2926080"/>
+            <a:ext cx="9144000" cy="5143500"/>
           </a:xfrm>
           <a:prstGeom prst="rect">
             <a:avLst/>
           </a:prstGeom>
           <a:solidFill>
-            <a:srgbClr val="0F2537"/>
+            <a:srgbClr val="0F2043"/>
           </a:solidFill>
           <a:ln>
             <a:noFill/>
@@ -3143,109 +3144,14 @@
       </p:sp>
       <p:sp>
         <p:nvSpPr>
-          <p:cNvPr id="3" name="Rectangle 2"/>
-          <p:cNvSpPr/>
-          <p:nvPr/>
-        </p:nvSpPr>
-        <p:spPr>
-          <a:xfrm>
-            <a:off x="0" y="2926080"/>
-            <a:ext cx="12191695" cy="73152"/>
-          </a:xfrm>
-          <a:prstGeom prst="rect">
-            <a:avLst/>
-          </a:prstGeom>
-          <a:solidFill>
-            <a:srgbClr val="0284C7"/>
-          </a:solidFill>
-          <a:ln>
-            <a:noFill/>
-          </a:ln>
-        </p:spPr>
-        <p:style>
-          <a:lnRef idx="1">
-            <a:schemeClr val="accent1"/>
-          </a:lnRef>
-          <a:fillRef idx="3">
-            <a:schemeClr val="accent1"/>
-          </a:fillRef>
-          <a:effectRef idx="2">
-            <a:schemeClr val="accent1"/>
-          </a:effectRef>
-          <a:fontRef idx="minor">
-            <a:schemeClr val="lt1"/>
-          </a:fontRef>
-        </p:style>
-        <p:txBody>
-          <a:bodyPr rtlCol="0" anchor="ctr"/>
-          <a:lstStyle/>
-          <a:p>
-            <a:pPr algn="ctr"/>
-          </a:p>
-        </p:txBody>
-      </p:sp>
-      <p:sp>
-        <p:nvSpPr>
-          <p:cNvPr id="4" name="Rounded Rectangle 3"/>
-          <p:cNvSpPr/>
-          <p:nvPr/>
-        </p:nvSpPr>
-        <p:spPr>
-          <a:xfrm>
-            <a:off x="914400" y="640080"/>
-            <a:ext cx="3474720" cy="411480"/>
-          </a:xfrm>
-          <a:prstGeom prst="roundRect">
-            <a:avLst/>
-          </a:prstGeom>
-          <a:solidFill>
-            <a:srgbClr val="0284C7"/>
-          </a:solidFill>
-          <a:ln>
-            <a:noFill/>
-          </a:ln>
-        </p:spPr>
-        <p:style>
-          <a:lnRef idx="1">
-            <a:schemeClr val="accent1"/>
-          </a:lnRef>
-          <a:fillRef idx="3">
-            <a:schemeClr val="accent1"/>
-          </a:fillRef>
-          <a:effectRef idx="2">
-            <a:schemeClr val="accent1"/>
-          </a:effectRef>
-          <a:fontRef idx="minor">
-            <a:schemeClr val="lt1"/>
-          </a:fontRef>
-        </p:style>
-        <p:txBody>
-          <a:bodyPr rtlCol="0" anchor="ctr"/>
-          <a:lstStyle/>
-          <a:p>
-            <a:pPr algn="ctr">
-              <a:defRPr sz="1100" b="1">
-                <a:solidFill>
-                  <a:srgbClr val="FFFFFF"/>
-                </a:solidFill>
-              </a:defRPr>
-            </a:pPr>
-            <a:r>
-              <a:t>AULA 01 | INF-117</a:t>
-            </a:r>
-          </a:p>
-        </p:txBody>
-      </p:sp>
-      <p:sp>
-        <p:nvSpPr>
-          <p:cNvPr id="5" name="TextBox 4"/>
+          <p:cNvPr id="3" name="TextBox 2"/>
           <p:cNvSpPr txBox="1"/>
           <p:nvPr/>
         </p:nvSpPr>
         <p:spPr>
           <a:xfrm>
-            <a:off x="914400" y="1234440"/>
-            <a:ext cx="10362895" cy="1463040"/>
+            <a:off x="548640" y="731520"/>
+            <a:ext cx="4389120" cy="3657600"/>
           </a:xfrm>
           <a:prstGeom prst="rect">
             <a:avLst/>
@@ -3259,81 +3165,107 @@
           <a:lstStyle/>
           <a:p>
             <a:pPr>
-              <a:defRPr sz="2800" b="1">
+              <a:defRPr sz="900" b="1">
+                <a:solidFill>
+                  <a:srgbClr val="0072CE"/>
+                </a:solidFill>
+                <a:latin typeface="Arial"/>
+              </a:defRPr>
+            </a:pPr>
+            <a:r>
+              <a:t>FATEC SOROCABA — CURSO SUPERIOR DE TECNOLOGIA EM MANUTENÇÃO DE AERONAVES</a:t>
+            </a:r>
+          </a:p>
+          <a:p>
+            <a:pPr>
+              <a:spcBef>
+                <a:spcPts val="1000"/>
+              </a:spcBef>
+              <a:defRPr sz="1300">
+                <a:solidFill>
+                  <a:srgbClr val="C8E1FF"/>
+                </a:solidFill>
+                <a:latin typeface="Arial"/>
+              </a:defRPr>
+            </a:pPr>
+            <a:r>
+              <a:t>INF-117 — Informática Aplicada a Aeronáutica</a:t>
+            </a:r>
+          </a:p>
+          <a:p>
+            <a:pPr>
+              <a:spcBef>
+                <a:spcPts val="1400"/>
+              </a:spcBef>
+              <a:defRPr sz="2200" b="1">
                 <a:solidFill>
                   <a:srgbClr val="FFFFFF"/>
                 </a:solidFill>
-              </a:defRPr>
-            </a:pPr>
-            <a:r>
-              <a:t>Hardware, Processadores e Estações de Trabalho</a:t>
-            </a:r>
-          </a:p>
-        </p:txBody>
-      </p:sp>
-      <p:sp>
-        <p:nvSpPr>
-          <p:cNvPr id="6" name="TextBox 5"/>
-          <p:cNvSpPr txBox="1"/>
+                <a:latin typeface="Arial"/>
+              </a:defRPr>
+            </a:pPr>
+            <a:r>
+              <a:t>Hardware, Processadores &amp; Estações de Trabalho</a:t>
+            </a:r>
+          </a:p>
+          <a:p>
+            <a:pPr>
+              <a:spcBef>
+                <a:spcPts val="1000"/>
+              </a:spcBef>
+              <a:defRPr sz="1100">
+                <a:solidFill>
+                  <a:srgbClr val="DCE6F5"/>
+                </a:solidFill>
+                <a:latin typeface="Arial"/>
+              </a:defRPr>
+            </a:pPr>
+            <a:r>
+              <a:t>Fundamentos da Arquitetura Computacional, Especificação MRO/Engenharia e Tópico Especial em Computação Quântica</a:t>
+            </a:r>
+          </a:p>
+          <a:p>
+            <a:pPr>
+              <a:spcBef>
+                <a:spcPts val="2400"/>
+              </a:spcBef>
+              <a:defRPr sz="1100" b="1">
+                <a:solidFill>
+                  <a:srgbClr val="0072CE"/>
+                </a:solidFill>
+                <a:latin typeface="Arial"/>
+              </a:defRPr>
+            </a:pPr>
+            <a:r>
+              <a:t>Prof. André Souza  |  Aula 01</a:t>
+            </a:r>
+          </a:p>
+        </p:txBody>
+      </p:sp>
+      <p:pic>
+        <p:nvPicPr>
+          <p:cNvPr id="4" name="Picture 3" descr="cover.jpg"/>
+          <p:cNvPicPr>
+            <a:picLocks noChangeAspect="1"/>
+          </p:cNvPicPr>
           <p:nvPr/>
-        </p:nvSpPr>
-        <p:spPr>
-          <a:xfrm>
-            <a:off x="914400" y="3383280"/>
-            <a:ext cx="10362895" cy="2926080"/>
+        </p:nvPicPr>
+        <p:blipFill>
+          <a:blip r:embed="rId2"/>
+          <a:stretch>
+            <a:fillRect/>
+          </a:stretch>
+        </p:blipFill>
+        <p:spPr>
+          <a:xfrm>
+            <a:off x="5029200" y="731520"/>
+            <a:ext cx="3657600" cy="3657600"/>
           </a:xfrm>
           <a:prstGeom prst="rect">
             <a:avLst/>
           </a:prstGeom>
-          <a:noFill/>
-        </p:spPr>
-        <p:txBody>
-          <a:bodyPr wrap="square">
-            <a:spAutoFit/>
-          </a:bodyPr>
-          <a:lstStyle/>
-          <a:p>
-            <a:pPr>
-              <a:defRPr sz="1600" b="1">
-                <a:solidFill>
-                  <a:srgbClr val="1E293B"/>
-                </a:solidFill>
-              </a:defRPr>
-            </a:pPr>
-            <a:r>
-              <a:t>Fundamentos de Arquitetura Computacional e Dimensionamento Técnico de Estações MRO e Engenharia</a:t>
-            </a:r>
-          </a:p>
-          <a:p>
-            <a:br/>
-            <a:pPr>
-              <a:spcBef>
-                <a:spcPts val="1000"/>
-              </a:spcBef>
-              <a:defRPr sz="1300">
-                <a:solidFill>
-                  <a:srgbClr val="64748B"/>
-                </a:solidFill>
-              </a:defRPr>
-            </a:pPr>
-            <a:r>
-              <a:t>• Componente Curricular: INF-117 — Informática Aplicada a Aeronáutica</a:t>
-            </a:r>
-            <a:br/>
-            <a:r>
-              <a:t>• Curso: Curso Superior de Tecnologia em Manutenção de Aeronaves</a:t>
-            </a:r>
-            <a:br/>
-            <a:r>
-              <a:t>• Instituição: Faculdade de Tecnologia de Sorocaba (Fatec Sorocaba - R-11)</a:t>
-            </a:r>
-            <a:br/>
-            <a:r>
-              <a:t>• Semestre Letivo: 1º Semestre</a:t>
-            </a:r>
-          </a:p>
-        </p:txBody>
-      </p:sp>
+        </p:spPr>
+      </p:pic>
     </p:spTree>
   </p:cSld>
   <p:clrMapOvr>
@@ -3354,75 +3286,23 @@
       <p:grpSpPr/>
       <p:sp>
         <p:nvSpPr>
-          <p:cNvPr id="2" name="TextBox 1"/>
-          <p:cNvSpPr txBox="1"/>
+          <p:cNvPr id="2" name="Rectangle 1"/>
+          <p:cNvSpPr/>
           <p:nvPr/>
         </p:nvSpPr>
         <p:spPr>
           <a:xfrm>
-            <a:off x="731520" y="365760"/>
-            <a:ext cx="10728655" cy="1005840"/>
+            <a:off x="0" y="0"/>
+            <a:ext cx="9144000" cy="822960"/>
           </a:xfrm>
           <a:prstGeom prst="rect">
             <a:avLst/>
           </a:prstGeom>
-          <a:noFill/>
-        </p:spPr>
-        <p:txBody>
-          <a:bodyPr wrap="square" lIns="0" tIns="0" rIns="0" bIns="0">
-            <a:spAutoFit/>
-          </a:bodyPr>
-          <a:lstStyle/>
-          <a:p>
-            <a:pPr>
-              <a:defRPr sz="1100" b="1">
-                <a:solidFill>
-                  <a:srgbClr val="0284C7"/>
-                </a:solidFill>
-              </a:defRPr>
-            </a:pPr>
-            <a:r>
-              <a:t>INF-117 | INFORMÁTICA APLICADA A AERONÁUTICA</a:t>
-            </a:r>
-          </a:p>
-          <a:p>
-            <a:pPr>
-              <a:spcBef>
-                <a:spcPts val="300"/>
-              </a:spcBef>
-              <a:defRPr sz="2200" b="1">
-                <a:solidFill>
-                  <a:srgbClr val="0F2537"/>
-                </a:solidFill>
-              </a:defRPr>
-            </a:pPr>
-            <a:r>
-              <a:t>Síntese dos Conceitos e Atividade de Fixação</a:t>
-            </a:r>
-          </a:p>
-        </p:txBody>
-      </p:sp>
-      <p:sp>
-        <p:nvSpPr>
-          <p:cNvPr id="3" name="Rounded Rectangle 2"/>
-          <p:cNvSpPr/>
-          <p:nvPr/>
-        </p:nvSpPr>
-        <p:spPr>
-          <a:xfrm>
-            <a:off x="731520" y="1554480"/>
-            <a:ext cx="5166360" cy="4480560"/>
-          </a:xfrm>
-          <a:prstGeom prst="roundRect">
-            <a:avLst/>
-          </a:prstGeom>
           <a:solidFill>
-            <a:srgbClr val="FFFFFF"/>
+            <a:srgbClr val="0F2043"/>
           </a:solidFill>
-          <a:ln w="12700">
-            <a:solidFill>
-              <a:srgbClr val="CBD5E1"/>
-            </a:solidFill>
+          <a:ln>
+            <a:noFill/>
           </a:ln>
         </p:spPr>
         <p:style>
@@ -3440,78 +3320,68 @@
           </a:fontRef>
         </p:style>
         <p:txBody>
-          <a:bodyPr rtlCol="0" anchor="ctr" wrap="square" lIns="274320" rIns="274320" tIns="274320"/>
+          <a:bodyPr rtlCol="0" anchor="ctr" wrap="square" lIns="457200" tIns="109728"/>
           <a:lstStyle/>
           <a:p>
             <a:pPr algn="ctr">
-              <a:defRPr sz="1600" b="1">
-                <a:solidFill>
-                  <a:srgbClr val="0F2537"/>
-                </a:solidFill>
-              </a:defRPr>
-            </a:pPr>
-            <a:r>
-              <a:t>Resumo dos Pontos-Chave</a:t>
-            </a:r>
-          </a:p>
-          <a:p>
-            <a:pPr>
-              <a:spcBef>
-                <a:spcPts val="600"/>
-              </a:spcBef>
-              <a:defRPr sz="1150">
-                <a:solidFill>
-                  <a:srgbClr val="1E293B"/>
-                </a:solidFill>
-              </a:defRPr>
-            </a:pPr>
-            <a:r>
-              <a:t>•  O hardware dimensiona a capacidade de entrega técnica do profissional.</a:t>
-            </a:r>
-          </a:p>
-          <a:p>
-            <a:pPr>
-              <a:spcBef>
-                <a:spcPts val="600"/>
-              </a:spcBef>
-              <a:defRPr sz="1150">
-                <a:solidFill>
-                  <a:srgbClr val="1E293B"/>
-                </a:solidFill>
-              </a:defRPr>
-            </a:pPr>
-            <a:r>
-              <a:t>•  Cada perfil de trabalho na aviação exige um equilíbrio específico de CPU, RAM e GPU.</a:t>
-            </a:r>
-          </a:p>
-          <a:p>
-            <a:pPr>
-              <a:spcBef>
-                <a:spcPts val="600"/>
-              </a:spcBef>
-              <a:defRPr sz="1150">
-                <a:solidFill>
-                  <a:srgbClr val="1E293B"/>
-                </a:solidFill>
-              </a:defRPr>
-            </a:pPr>
-            <a:r>
-              <a:t>•  A computação em nuvem (Office 365) complementa o hardware local.</a:t>
-            </a:r>
-          </a:p>
-          <a:p>
-            <a:pPr>
-              <a:spcBef>
-                <a:spcPts val="600"/>
-              </a:spcBef>
-              <a:defRPr sz="1150">
-                <a:solidFill>
-                  <a:srgbClr val="1E293B"/>
-                </a:solidFill>
-              </a:defRPr>
-            </a:pPr>
-            <a:r>
-              <a:t>•  Conhecer a máquina é o primeiro passo para o domínio da informática técnica.</a:t>
+              <a:defRPr sz="900" b="1">
+                <a:solidFill>
+                  <a:srgbClr val="0072CE"/>
+                </a:solidFill>
+                <a:latin typeface="Arial"/>
+              </a:defRPr>
+            </a:pPr>
+            <a:r>
+              <a:t>INF-117 — INFORMÁTICA APLICADA A AERONÁUTICA</a:t>
+            </a:r>
+          </a:p>
+          <a:p>
+            <a:pPr>
+              <a:defRPr sz="1800" b="1">
+                <a:solidFill>
+                  <a:srgbClr val="FFFFFF"/>
+                </a:solidFill>
+                <a:latin typeface="Arial"/>
+              </a:defRPr>
+            </a:pPr>
+            <a:r>
+              <a:t>Prática em Laboratório — Diagnóstico no Windows 11</a:t>
+            </a:r>
+          </a:p>
+        </p:txBody>
+      </p:sp>
+      <p:sp>
+        <p:nvSpPr>
+          <p:cNvPr id="3" name="TextBox 2"/>
+          <p:cNvSpPr txBox="1"/>
+          <p:nvPr/>
+        </p:nvSpPr>
+        <p:spPr>
+          <a:xfrm>
+            <a:off x="457200" y="4800600"/>
+            <a:ext cx="8229600" cy="274320"/>
+          </a:xfrm>
+          <a:prstGeom prst="rect">
+            <a:avLst/>
+          </a:prstGeom>
+          <a:noFill/>
+        </p:spPr>
+        <p:txBody>
+          <a:bodyPr wrap="none">
+            <a:spAutoFit/>
+          </a:bodyPr>
+          <a:lstStyle/>
+          <a:p>
+            <a:pPr>
+              <a:defRPr sz="900">
+                <a:solidFill>
+                  <a:srgbClr val="5A5A5A"/>
+                </a:solidFill>
+                <a:latin typeface="Arial"/>
+              </a:defRPr>
+            </a:pPr>
+            <a:r>
+              <a:t>Fatec Sorocaba — CST em Manutenção de Aeronaves  |  Slide 10 de 12</a:t>
             </a:r>
           </a:p>
         </p:txBody>
@@ -3524,8 +3394,8 @@
         </p:nvSpPr>
         <p:spPr>
           <a:xfrm>
-            <a:off x="6263640" y="1554480"/>
-            <a:ext cx="5166360" cy="4480560"/>
+            <a:off x="548640" y="1097280"/>
+            <a:ext cx="8046720" cy="1051560"/>
           </a:xfrm>
           <a:prstGeom prst="roundRect">
             <a:avLst/>
@@ -3533,9 +3403,9 @@
           <a:solidFill>
             <a:srgbClr val="FFFFFF"/>
           </a:solidFill>
-          <a:ln w="12700">
+          <a:ln>
             <a:solidFill>
-              <a:srgbClr val="CBD5E1"/>
+              <a:srgbClr val="D2DCE6"/>
             </a:solidFill>
           </a:ln>
         </p:spPr>
@@ -3554,79 +3424,10 @@
           </a:fontRef>
         </p:style>
         <p:txBody>
-          <a:bodyPr rtlCol="0" anchor="ctr" wrap="square" lIns="274320" rIns="274320" tIns="274320"/>
-          <a:lstStyle/>
-          <a:p>
-            <a:pPr algn="ctr">
-              <a:defRPr sz="1600" b="1">
-                <a:solidFill>
-                  <a:srgbClr val="0284C7"/>
-                </a:solidFill>
-              </a:defRPr>
-            </a:pPr>
-            <a:r>
-              <a:t>Atividade no Laboratório</a:t>
-            </a:r>
-          </a:p>
-          <a:p>
-            <a:pPr>
-              <a:spcBef>
-                <a:spcPts val="600"/>
-              </a:spcBef>
-              <a:defRPr sz="1150">
-                <a:solidFill>
-                  <a:srgbClr val="1E293B"/>
-                </a:solidFill>
-              </a:defRPr>
-            </a:pPr>
-            <a:r>
-              <a:t>•  1. Executar o diagnóstico de hardware do computador da bancada via Gerenciador de Tarefas.</a:t>
-            </a:r>
-          </a:p>
-          <a:p>
-            <a:pPr>
-              <a:spcBef>
-                <a:spcPts val="600"/>
-              </a:spcBef>
-              <a:defRPr sz="1150">
-                <a:solidFill>
-                  <a:srgbClr val="1E293B"/>
-                </a:solidFill>
-              </a:defRPr>
-            </a:pPr>
-            <a:r>
-              <a:t>•  2. Anotar processador, clock, quantidade de RAM e tipo de disco.</a:t>
-            </a:r>
-          </a:p>
-          <a:p>
-            <a:pPr>
-              <a:spcBef>
-                <a:spcPts val="600"/>
-              </a:spcBef>
-              <a:defRPr sz="1150">
-                <a:solidFill>
-                  <a:srgbClr val="1E293B"/>
-                </a:solidFill>
-              </a:defRPr>
-            </a:pPr>
-            <a:r>
-              <a:t>•  3. Preencher a tabela de especificação técnica justificando cada escolha técnica.</a:t>
-            </a:r>
-          </a:p>
-          <a:p>
-            <a:pPr>
-              <a:spcBef>
-                <a:spcPts val="600"/>
-              </a:spcBef>
-              <a:defRPr sz="1150">
-                <a:solidFill>
-                  <a:srgbClr val="1E293B"/>
-                </a:solidFill>
-              </a:defRPr>
-            </a:pPr>
-            <a:r>
-              <a:t>•  4. Próxima Aula: MS Word Técnico e Formatação de Relatórios ABNT.</a:t>
-            </a:r>
+          <a:bodyPr rtlCol="0" anchor="ctr"/>
+          <a:lstStyle/>
+          <a:p>
+            <a:pPr algn="ctr"/>
           </a:p>
         </p:txBody>
       </p:sp>
@@ -3638,8 +3439,8 @@
         </p:nvSpPr>
         <p:spPr>
           <a:xfrm>
-            <a:off x="731520" y="6309360"/>
-            <a:ext cx="10728655" cy="365760"/>
+            <a:off x="731520" y="1170432"/>
+            <a:ext cx="7680960" cy="914400"/>
           </a:xfrm>
           <a:prstGeom prst="rect">
             <a:avLst/>
@@ -3647,20 +3448,270 @@
           <a:noFill/>
         </p:spPr>
         <p:txBody>
-          <a:bodyPr wrap="none" lIns="0" tIns="0" rIns="0" bIns="0">
+          <a:bodyPr wrap="square">
             <a:spAutoFit/>
           </a:bodyPr>
           <a:lstStyle/>
           <a:p>
             <a:pPr>
-              <a:defRPr sz="900">
-                <a:solidFill>
-                  <a:srgbClr val="64748B"/>
-                </a:solidFill>
-              </a:defRPr>
-            </a:pPr>
-            <a:r>
-              <a:t>Fatec Sorocaba — CST em Manutenção de Aeronaves  |  Prof. André Souza  |  Slide 10 de 11</a:t>
+              <a:defRPr b="1" sz="1200">
+                <a:solidFill>
+                  <a:srgbClr val="0F2043"/>
+                </a:solidFill>
+              </a:defRPr>
+            </a:pPr>
+            <a:r>
+              <a:t>1. Informações do Sistema (`msinfo32` / Settings)</a:t>
+            </a:r>
+          </a:p>
+          <a:p>
+            <a:pPr>
+              <a:spcBef>
+                <a:spcPts val="200"/>
+              </a:spcBef>
+              <a:defRPr sz="1000">
+                <a:solidFill>
+                  <a:srgbClr val="282828"/>
+                </a:solidFill>
+              </a:defRPr>
+            </a:pPr>
+            <a:r>
+              <a:t>Verifique o modelo exato do processador (CPU), clock base e quantidade de Memória RAM instalada no computador da bancada.</a:t>
+            </a:r>
+          </a:p>
+          <a:p>
+            <a:pPr>
+              <a:spcBef>
+                <a:spcPts val="200"/>
+              </a:spcBef>
+              <a:defRPr sz="900" b="1">
+                <a:solidFill>
+                  <a:srgbClr val="0072CE"/>
+                </a:solidFill>
+              </a:defRPr>
+            </a:pPr>
+            <a:r>
+              <a:t>💡 Dica Prática: Atalho: Win + Pause/Break ou Configurações -&gt; Sistema -&gt; Sobre</a:t>
+            </a:r>
+          </a:p>
+        </p:txBody>
+      </p:sp>
+      <p:sp>
+        <p:nvSpPr>
+          <p:cNvPr id="6" name="Rounded Rectangle 5"/>
+          <p:cNvSpPr/>
+          <p:nvPr/>
+        </p:nvSpPr>
+        <p:spPr>
+          <a:xfrm>
+            <a:off x="548640" y="2286000"/>
+            <a:ext cx="8046720" cy="1051560"/>
+          </a:xfrm>
+          <a:prstGeom prst="roundRect">
+            <a:avLst/>
+          </a:prstGeom>
+          <a:solidFill>
+            <a:srgbClr val="FFFFFF"/>
+          </a:solidFill>
+          <a:ln>
+            <a:solidFill>
+              <a:srgbClr val="D2DCE6"/>
+            </a:solidFill>
+          </a:ln>
+        </p:spPr>
+        <p:style>
+          <a:lnRef idx="1">
+            <a:schemeClr val="accent1"/>
+          </a:lnRef>
+          <a:fillRef idx="3">
+            <a:schemeClr val="accent1"/>
+          </a:fillRef>
+          <a:effectRef idx="2">
+            <a:schemeClr val="accent1"/>
+          </a:effectRef>
+          <a:fontRef idx="minor">
+            <a:schemeClr val="lt1"/>
+          </a:fontRef>
+        </p:style>
+        <p:txBody>
+          <a:bodyPr rtlCol="0" anchor="ctr"/>
+          <a:lstStyle/>
+          <a:p>
+            <a:pPr algn="ctr"/>
+          </a:p>
+        </p:txBody>
+      </p:sp>
+      <p:sp>
+        <p:nvSpPr>
+          <p:cNvPr id="7" name="TextBox 6"/>
+          <p:cNvSpPr txBox="1"/>
+          <p:nvPr/>
+        </p:nvSpPr>
+        <p:spPr>
+          <a:xfrm>
+            <a:off x="731520" y="2359152"/>
+            <a:ext cx="7680960" cy="914400"/>
+          </a:xfrm>
+          <a:prstGeom prst="rect">
+            <a:avLst/>
+          </a:prstGeom>
+          <a:noFill/>
+        </p:spPr>
+        <p:txBody>
+          <a:bodyPr wrap="square">
+            <a:spAutoFit/>
+          </a:bodyPr>
+          <a:lstStyle/>
+          <a:p>
+            <a:pPr>
+              <a:defRPr b="1" sz="1200">
+                <a:solidFill>
+                  <a:srgbClr val="0F2043"/>
+                </a:solidFill>
+              </a:defRPr>
+            </a:pPr>
+            <a:r>
+              <a:t>2. Gerenciador de Tarefas (`Ctrl + Shift + Esc`)</a:t>
+            </a:r>
+          </a:p>
+          <a:p>
+            <a:pPr>
+              <a:spcBef>
+                <a:spcPts val="200"/>
+              </a:spcBef>
+              <a:defRPr sz="1000">
+                <a:solidFill>
+                  <a:srgbClr val="282828"/>
+                </a:solidFill>
+              </a:defRPr>
+            </a:pPr>
+            <a:r>
+              <a:t>Abra a aba Desempenho para monitorar a utilização da CPU em tempo real e se a memória está saturada.</a:t>
+            </a:r>
+          </a:p>
+          <a:p>
+            <a:pPr>
+              <a:spcBef>
+                <a:spcPts val="200"/>
+              </a:spcBef>
+              <a:defRPr sz="900" b="1">
+                <a:solidFill>
+                  <a:srgbClr val="0072CE"/>
+                </a:solidFill>
+              </a:defRPr>
+            </a:pPr>
+            <a:r>
+              <a:t>💡 Dica Prática: Identifique o tipo de disco (SSD NVMe vs HDD) e a taxa de uso em %</a:t>
+            </a:r>
+          </a:p>
+        </p:txBody>
+      </p:sp>
+      <p:sp>
+        <p:nvSpPr>
+          <p:cNvPr id="8" name="Rounded Rectangle 7"/>
+          <p:cNvSpPr/>
+          <p:nvPr/>
+        </p:nvSpPr>
+        <p:spPr>
+          <a:xfrm>
+            <a:off x="548640" y="3474720"/>
+            <a:ext cx="8046720" cy="1051560"/>
+          </a:xfrm>
+          <a:prstGeom prst="roundRect">
+            <a:avLst/>
+          </a:prstGeom>
+          <a:solidFill>
+            <a:srgbClr val="FFFFFF"/>
+          </a:solidFill>
+          <a:ln>
+            <a:solidFill>
+              <a:srgbClr val="D2DCE6"/>
+            </a:solidFill>
+          </a:ln>
+        </p:spPr>
+        <p:style>
+          <a:lnRef idx="1">
+            <a:schemeClr val="accent1"/>
+          </a:lnRef>
+          <a:fillRef idx="3">
+            <a:schemeClr val="accent1"/>
+          </a:fillRef>
+          <a:effectRef idx="2">
+            <a:schemeClr val="accent1"/>
+          </a:effectRef>
+          <a:fontRef idx="minor">
+            <a:schemeClr val="lt1"/>
+          </a:fontRef>
+        </p:style>
+        <p:txBody>
+          <a:bodyPr rtlCol="0" anchor="ctr"/>
+          <a:lstStyle/>
+          <a:p>
+            <a:pPr algn="ctr"/>
+          </a:p>
+        </p:txBody>
+      </p:sp>
+      <p:sp>
+        <p:nvSpPr>
+          <p:cNvPr id="9" name="TextBox 8"/>
+          <p:cNvSpPr txBox="1"/>
+          <p:nvPr/>
+        </p:nvSpPr>
+        <p:spPr>
+          <a:xfrm>
+            <a:off x="731520" y="3547872"/>
+            <a:ext cx="7680960" cy="914400"/>
+          </a:xfrm>
+          <a:prstGeom prst="rect">
+            <a:avLst/>
+          </a:prstGeom>
+          <a:noFill/>
+        </p:spPr>
+        <p:txBody>
+          <a:bodyPr wrap="square">
+            <a:spAutoFit/>
+          </a:bodyPr>
+          <a:lstStyle/>
+          <a:p>
+            <a:pPr>
+              <a:defRPr b="1" sz="1200">
+                <a:solidFill>
+                  <a:srgbClr val="0F2043"/>
+                </a:solidFill>
+              </a:defRPr>
+            </a:pPr>
+            <a:r>
+              <a:t>3. Identificação de Gargalos Computacionais</a:t>
+            </a:r>
+          </a:p>
+          <a:p>
+            <a:pPr>
+              <a:spcBef>
+                <a:spcPts val="200"/>
+              </a:spcBef>
+              <a:defRPr sz="1000">
+                <a:solidFill>
+                  <a:srgbClr val="282828"/>
+                </a:solidFill>
+              </a:defRPr>
+            </a:pPr>
+            <a:r>
+              <a:t>Avalie se a taxa de ocupação da RAM supera 80% e se o disco atinge 100% de uso constante durante a abertura de arquivos grandes.</a:t>
+            </a:r>
+          </a:p>
+          <a:p>
+            <a:pPr>
+              <a:spcBef>
+                <a:spcPts val="200"/>
+              </a:spcBef>
+              <a:defRPr sz="900" b="1">
+                <a:solidFill>
+                  <a:srgbClr val="0072CE"/>
+                </a:solidFill>
+              </a:defRPr>
+            </a:pPr>
+            <a:r>
+              <a:t>💡 Dica Prática: Gargalo no disco indica necessidade imediata de upgrade para SSD NVMe</a:t>
             </a:r>
           </a:p>
         </p:txBody>
@@ -3692,13 +3743,13 @@
         <p:spPr>
           <a:xfrm>
             <a:off x="0" y="0"/>
-            <a:ext cx="12191695" cy="2926080"/>
+            <a:ext cx="9144000" cy="822960"/>
           </a:xfrm>
           <a:prstGeom prst="rect">
             <a:avLst/>
           </a:prstGeom>
           <a:solidFill>
-            <a:srgbClr val="0F2537"/>
+            <a:srgbClr val="0F2043"/>
           </a:solidFill>
           <a:ln>
             <a:noFill/>
@@ -3719,32 +3770,93 @@
           </a:fontRef>
         </p:style>
         <p:txBody>
-          <a:bodyPr rtlCol="0" anchor="ctr"/>
-          <a:lstStyle/>
-          <a:p>
-            <a:pPr algn="ctr"/>
-          </a:p>
-        </p:txBody>
-      </p:sp>
-      <p:sp>
-        <p:nvSpPr>
-          <p:cNvPr id="3" name="Rectangle 2"/>
-          <p:cNvSpPr/>
+          <a:bodyPr rtlCol="0" anchor="ctr" wrap="square" lIns="457200" tIns="109728"/>
+          <a:lstStyle/>
+          <a:p>
+            <a:pPr algn="ctr">
+              <a:defRPr sz="900" b="1">
+                <a:solidFill>
+                  <a:srgbClr val="0072CE"/>
+                </a:solidFill>
+                <a:latin typeface="Arial"/>
+              </a:defRPr>
+            </a:pPr>
+            <a:r>
+              <a:t>INF-117 — INFORMÁTICA APLICADA A AERONÁUTICA</a:t>
+            </a:r>
+          </a:p>
+          <a:p>
+            <a:pPr>
+              <a:defRPr sz="1800" b="1">
+                <a:solidFill>
+                  <a:srgbClr val="FFFFFF"/>
+                </a:solidFill>
+                <a:latin typeface="Arial"/>
+              </a:defRPr>
+            </a:pPr>
+            <a:r>
+              <a:t>Exercício de Fixação Computacional — Parecer Técnico</a:t>
+            </a:r>
+          </a:p>
+        </p:txBody>
+      </p:sp>
+      <p:sp>
+        <p:nvSpPr>
+          <p:cNvPr id="3" name="TextBox 2"/>
+          <p:cNvSpPr txBox="1"/>
           <p:nvPr/>
         </p:nvSpPr>
         <p:spPr>
           <a:xfrm>
-            <a:off x="0" y="2926080"/>
-            <a:ext cx="12191695" cy="73152"/>
+            <a:off x="457200" y="4800600"/>
+            <a:ext cx="8229600" cy="274320"/>
           </a:xfrm>
           <a:prstGeom prst="rect">
             <a:avLst/>
           </a:prstGeom>
+          <a:noFill/>
+        </p:spPr>
+        <p:txBody>
+          <a:bodyPr wrap="none">
+            <a:spAutoFit/>
+          </a:bodyPr>
+          <a:lstStyle/>
+          <a:p>
+            <a:pPr>
+              <a:defRPr sz="900">
+                <a:solidFill>
+                  <a:srgbClr val="5A5A5A"/>
+                </a:solidFill>
+                <a:latin typeface="Arial"/>
+              </a:defRPr>
+            </a:pPr>
+            <a:r>
+              <a:t>Fatec Sorocaba — CST em Manutenção de Aeronaves  |  Slide 11 de 12</a:t>
+            </a:r>
+          </a:p>
+        </p:txBody>
+      </p:sp>
+      <p:sp>
+        <p:nvSpPr>
+          <p:cNvPr id="4" name="Rounded Rectangle 3"/>
+          <p:cNvSpPr/>
+          <p:nvPr/>
+        </p:nvSpPr>
+        <p:spPr>
+          <a:xfrm>
+            <a:off x="548640" y="1097280"/>
+            <a:ext cx="8046720" cy="3474720"/>
+          </a:xfrm>
+          <a:prstGeom prst="roundRect">
+            <a:avLst/>
+          </a:prstGeom>
           <a:solidFill>
-            <a:srgbClr val="0284C7"/>
+            <a:srgbClr val="E6F0FA"/>
           </a:solidFill>
           <a:ln>
-            <a:noFill/>
+            <a:solidFill>
+              <a:srgbClr val="D2DCE6"/>
+            </a:solidFill>
           </a:ln>
         </p:spPr>
         <p:style>
@@ -3771,20 +3883,163 @@
       </p:sp>
       <p:sp>
         <p:nvSpPr>
-          <p:cNvPr id="4" name="Rounded Rectangle 3"/>
+          <p:cNvPr id="5" name="TextBox 4"/>
+          <p:cNvSpPr txBox="1"/>
+          <p:nvPr/>
+        </p:nvSpPr>
+        <p:spPr>
+          <a:xfrm>
+            <a:off x="731520" y="1188720"/>
+            <a:ext cx="7680960" cy="3291840"/>
+          </a:xfrm>
+          <a:prstGeom prst="rect">
+            <a:avLst/>
+          </a:prstGeom>
+          <a:noFill/>
+        </p:spPr>
+        <p:txBody>
+          <a:bodyPr wrap="square">
+            <a:spAutoFit/>
+          </a:bodyPr>
+          <a:lstStyle/>
+          <a:p>
+            <a:pPr>
+              <a:defRPr b="1" sz="1400">
+                <a:solidFill>
+                  <a:srgbClr val="0F2043"/>
+                </a:solidFill>
+              </a:defRPr>
+            </a:pPr>
+            <a:r>
+              <a:t>DESAFIO INDIVIDUAL NO LABORATORIO</a:t>
+            </a:r>
+          </a:p>
+          <a:p>
+            <a:pPr>
+              <a:spcBef>
+                <a:spcPts val="800"/>
+              </a:spcBef>
+              <a:defRPr b="1" sz="1200">
+                <a:solidFill>
+                  <a:srgbClr val="0F2043"/>
+                </a:solidFill>
+              </a:defRPr>
+            </a:pPr>
+            <a:r>
+              <a:t>Cenário Prático: Você foi designado para emitir o parecer técnico de aquisição de 2 computadores para a nova base da oficina:</a:t>
+            </a:r>
+          </a:p>
+          <a:p>
+            <a:pPr>
+              <a:spcBef>
+                <a:spcPts val="400"/>
+              </a:spcBef>
+              <a:defRPr sz="1100">
+                <a:solidFill>
+                  <a:srgbClr val="282828"/>
+                </a:solidFill>
+              </a:defRPr>
+            </a:pPr>
+            <a:r>
+              <a:t>1. Estação de Bancada / Hangar: Lançamento de Ordens de Serviço (OS) e consulta a manuais técnicos AMM/IPC.</a:t>
+            </a:r>
+          </a:p>
+          <a:p>
+            <a:pPr>
+              <a:spcBef>
+                <a:spcPts val="400"/>
+              </a:spcBef>
+              <a:defRPr sz="1100">
+                <a:solidFill>
+                  <a:srgbClr val="282828"/>
+                </a:solidFill>
+              </a:defRPr>
+            </a:pPr>
+            <a:r>
+              <a:t>2. Workstation de Engenharia &amp; Confiabilidade: Análise de falhas de frota, cálculos em planilhas pesadas e modelos CAD 3D.</a:t>
+            </a:r>
+          </a:p>
+          <a:p>
+            <a:pPr>
+              <a:spcBef>
+                <a:spcPts val="800"/>
+              </a:spcBef>
+              <a:defRPr b="1" sz="1200">
+                <a:solidFill>
+                  <a:srgbClr val="0F2043"/>
+                </a:solidFill>
+              </a:defRPr>
+            </a:pPr>
+            <a:r>
+              <a:t>Entregável Esperado:</a:t>
+            </a:r>
+          </a:p>
+          <a:p>
+            <a:pPr>
+              <a:spcBef>
+                <a:spcPts val="400"/>
+              </a:spcBef>
+              <a:defRPr sz="1100">
+                <a:solidFill>
+                  <a:srgbClr val="282828"/>
+                </a:solidFill>
+              </a:defRPr>
+            </a:pPr>
+            <a:r>
+              <a:t>• Monte uma tabela especificada detalhando: CPU (Cores/Clock), RAM (GB/Freq.), Armazenamento (Tipo/Capacidade), GPU e Monitores.</a:t>
+            </a:r>
+          </a:p>
+          <a:p>
+            <a:pPr>
+              <a:spcBef>
+                <a:spcPts val="400"/>
+              </a:spcBef>
+              <a:defRPr sz="1100">
+                <a:solidFill>
+                  <a:srgbClr val="282828"/>
+                </a:solidFill>
+              </a:defRPr>
+            </a:pPr>
+            <a:r>
+              <a:t>• Apresente a JUSTIFICATIVA TÉCNICA para cada componente selecionado com base nos conceitos aprendidos nesta aula.</a:t>
+            </a:r>
+          </a:p>
+        </p:txBody>
+      </p:sp>
+    </p:spTree>
+  </p:cSld>
+  <p:clrMapOvr>
+    <a:masterClrMapping/>
+  </p:clrMapOvr>
+</p:sld>
+</file>
+
+<file path=ppt/slides/slide12.xml><?xml version="1.0" encoding="utf-8"?>
+<p:sld xmlns:a="http://schemas.openxmlformats.org/drawingml/2006/main" xmlns:p="http://schemas.openxmlformats.org/presentationml/2006/main" xmlns:r="http://schemas.openxmlformats.org/officeDocument/2006/relationships">
+  <p:cSld>
+    <p:spTree>
+      <p:nvGrpSpPr>
+        <p:cNvPr id="1" name=""/>
+        <p:cNvGrpSpPr/>
+        <p:nvPr/>
+      </p:nvGrpSpPr>
+      <p:grpSpPr/>
+      <p:sp>
+        <p:nvSpPr>
+          <p:cNvPr id="2" name="Rectangle 1"/>
           <p:cNvSpPr/>
           <p:nvPr/>
         </p:nvSpPr>
         <p:spPr>
           <a:xfrm>
-            <a:off x="914400" y="640080"/>
-            <a:ext cx="3474720" cy="411480"/>
-          </a:xfrm>
-          <a:prstGeom prst="roundRect">
+            <a:off x="0" y="0"/>
+            <a:ext cx="9144000" cy="5143500"/>
+          </a:xfrm>
+          <a:prstGeom prst="rect">
             <a:avLst/>
           </a:prstGeom>
           <a:solidFill>
-            <a:srgbClr val="0284C7"/>
+            <a:srgbClr val="0F2043"/>
           </a:solidFill>
           <a:ln>
             <a:noFill/>
@@ -3808,29 +4063,20 @@
           <a:bodyPr rtlCol="0" anchor="ctr"/>
           <a:lstStyle/>
           <a:p>
-            <a:pPr algn="ctr">
-              <a:defRPr sz="1100" b="1">
-                <a:solidFill>
-                  <a:srgbClr val="FFFFFF"/>
-                </a:solidFill>
-              </a:defRPr>
-            </a:pPr>
-            <a:r>
-              <a:t>INF-117 | FATEC SOROCABA</a:t>
-            </a:r>
-          </a:p>
-        </p:txBody>
-      </p:sp>
-      <p:sp>
-        <p:nvSpPr>
-          <p:cNvPr id="5" name="TextBox 4"/>
+            <a:pPr algn="ctr"/>
+          </a:p>
+        </p:txBody>
+      </p:sp>
+      <p:sp>
+        <p:nvSpPr>
+          <p:cNvPr id="3" name="TextBox 2"/>
           <p:cNvSpPr txBox="1"/>
           <p:nvPr/>
         </p:nvSpPr>
         <p:spPr>
           <a:xfrm>
-            <a:off x="914400" y="1234440"/>
-            <a:ext cx="10362895" cy="1463040"/>
+            <a:off x="914400" y="1097280"/>
+            <a:ext cx="7315200" cy="3200400"/>
           </a:xfrm>
           <a:prstGeom prst="rect">
             <a:avLst/>
@@ -3844,82 +4090,59 @@
           <a:lstStyle/>
           <a:p>
             <a:pPr>
-              <a:defRPr sz="2800" b="1">
+              <a:defRPr sz="1400">
+                <a:solidFill>
+                  <a:srgbClr val="0072CE"/>
+                </a:solidFill>
+              </a:defRPr>
+            </a:pPr>
+            <a:r>
+              <a:t>INF-117 — Informática Aplicada a Aeronáutica</a:t>
+            </a:r>
+          </a:p>
+          <a:p>
+            <a:pPr>
+              <a:spcBef>
+                <a:spcPts val="1200"/>
+              </a:spcBef>
+              <a:defRPr sz="2600" b="1">
                 <a:solidFill>
                   <a:srgbClr val="FFFFFF"/>
                 </a:solidFill>
               </a:defRPr>
             </a:pPr>
             <a:r>
-              <a:t>Obrigado! Bons Estudos!</a:t>
-            </a:r>
-          </a:p>
-        </p:txBody>
-      </p:sp>
-      <p:sp>
-        <p:nvSpPr>
-          <p:cNvPr id="6" name="TextBox 5"/>
-          <p:cNvSpPr txBox="1"/>
-          <p:nvPr/>
-        </p:nvSpPr>
-        <p:spPr>
-          <a:xfrm>
-            <a:off x="914400" y="3383280"/>
-            <a:ext cx="10362895" cy="2926080"/>
-          </a:xfrm>
-          <a:prstGeom prst="rect">
-            <a:avLst/>
-          </a:prstGeom>
-          <a:noFill/>
-        </p:spPr>
-        <p:txBody>
-          <a:bodyPr wrap="square">
-            <a:spAutoFit/>
-          </a:bodyPr>
-          <a:lstStyle/>
-          <a:p>
-            <a:pPr>
-              <a:defRPr sz="1600" b="1">
-                <a:solidFill>
-                  <a:srgbClr val="1E293B"/>
-                </a:solidFill>
-              </a:defRPr>
-            </a:pPr>
-            <a:r>
-              <a:t>Próxima Aula: MS Word Técnico — Estilos ABNT, Quebras de Seção e Sumários Automáticos</a:t>
-            </a:r>
-            <a:br/>
-            <a:br/>
-            <a:r>
-              <a:t>Consulte o material expandido em Semana_01.md e Semana_02.md</a:t>
-            </a:r>
-          </a:p>
-          <a:p>
-            <a:br/>
-            <a:pPr>
-              <a:spcBef>
-                <a:spcPts val="1000"/>
+              <a:t>Obrigado e Bom Trabalho Prático!</a:t>
+            </a:r>
+          </a:p>
+          <a:p>
+            <a:pPr>
+              <a:spcBef>
+                <a:spcPts val="1600"/>
               </a:spcBef>
               <a:defRPr sz="1300">
                 <a:solidFill>
-                  <a:srgbClr val="64748B"/>
-                </a:solidFill>
-              </a:defRPr>
-            </a:pPr>
-            <a:r>
-              <a:t>• Componente Curricular: INF-117 — Informática Aplicada a Aeronáutica</a:t>
-            </a:r>
-            <a:br/>
-            <a:r>
-              <a:t>• Curso: Curso Superior de Tecnologia em Manutenção de Aeronaves</a:t>
-            </a:r>
-            <a:br/>
-            <a:r>
-              <a:t>• Instituição: Faculdade de Tecnologia de Sorocaba (Fatec Sorocaba - R-11)</a:t>
-            </a:r>
-            <a:br/>
-            <a:r>
-              <a:t>• Semestre Letivo: 1º Semestre</a:t>
+                  <a:srgbClr val="C8E1FF"/>
+                </a:solidFill>
+              </a:defRPr>
+            </a:pPr>
+            <a:r>
+              <a:t>Próxima Aula (Aula 02): MS Word Técnico para Relatórios Formais — Estilos ABNT, Quebras de Seção, Sumários Automáticos e Tabelas de Engenharia.</a:t>
+            </a:r>
+          </a:p>
+          <a:p>
+            <a:pPr>
+              <a:spcBef>
+                <a:spcPts val="3000"/>
+              </a:spcBef>
+              <a:defRPr sz="1100">
+                <a:solidFill>
+                  <a:srgbClr val="5A5A5A"/>
+                </a:solidFill>
+              </a:defRPr>
+            </a:pPr>
+            <a:r>
+              <a:t>Fatec Sorocaba — CST em Manutenção de Aeronaves</a:t>
             </a:r>
           </a:p>
         </p:txBody>
@@ -3944,75 +4167,23 @@
       <p:grpSpPr/>
       <p:sp>
         <p:nvSpPr>
-          <p:cNvPr id="2" name="TextBox 1"/>
-          <p:cNvSpPr txBox="1"/>
+          <p:cNvPr id="2" name="Rectangle 1"/>
+          <p:cNvSpPr/>
           <p:nvPr/>
         </p:nvSpPr>
         <p:spPr>
           <a:xfrm>
-            <a:off x="731520" y="365760"/>
-            <a:ext cx="10728655" cy="1005840"/>
+            <a:off x="0" y="0"/>
+            <a:ext cx="9144000" cy="822960"/>
           </a:xfrm>
           <a:prstGeom prst="rect">
             <a:avLst/>
           </a:prstGeom>
-          <a:noFill/>
-        </p:spPr>
-        <p:txBody>
-          <a:bodyPr wrap="square" lIns="0" tIns="0" rIns="0" bIns="0">
-            <a:spAutoFit/>
-          </a:bodyPr>
-          <a:lstStyle/>
-          <a:p>
-            <a:pPr>
-              <a:defRPr sz="1100" b="1">
-                <a:solidFill>
-                  <a:srgbClr val="0284C7"/>
-                </a:solidFill>
-              </a:defRPr>
-            </a:pPr>
-            <a:r>
-              <a:t>INF-117 | INFORMÁTICA APLICADA A AERONÁUTICA</a:t>
-            </a:r>
-          </a:p>
-          <a:p>
-            <a:pPr>
-              <a:spcBef>
-                <a:spcPts val="300"/>
-              </a:spcBef>
-              <a:defRPr sz="2200" b="1">
-                <a:solidFill>
-                  <a:srgbClr val="0F2537"/>
-                </a:solidFill>
-              </a:defRPr>
-            </a:pPr>
-            <a:r>
-              <a:t>Objetivos de Aprendizagem da Aula 01</a:t>
-            </a:r>
-          </a:p>
-        </p:txBody>
-      </p:sp>
-      <p:sp>
-        <p:nvSpPr>
-          <p:cNvPr id="3" name="Rounded Rectangle 2"/>
-          <p:cNvSpPr/>
-          <p:nvPr/>
-        </p:nvSpPr>
-        <p:spPr>
-          <a:xfrm>
-            <a:off x="731520" y="1554480"/>
-            <a:ext cx="5166360" cy="4480560"/>
-          </a:xfrm>
-          <a:prstGeom prst="roundRect">
-            <a:avLst/>
-          </a:prstGeom>
           <a:solidFill>
-            <a:srgbClr val="FFFFFF"/>
+            <a:srgbClr val="0F2043"/>
           </a:solidFill>
-          <a:ln w="12700">
-            <a:solidFill>
-              <a:srgbClr val="CBD5E1"/>
-            </a:solidFill>
+          <a:ln>
+            <a:noFill/>
           </a:ln>
         </p:spPr>
         <p:style>
@@ -4030,206 +4201,46 @@
           </a:fontRef>
         </p:style>
         <p:txBody>
-          <a:bodyPr rtlCol="0" anchor="ctr" wrap="square" lIns="274320" rIns="274320" tIns="274320"/>
+          <a:bodyPr rtlCol="0" anchor="ctr" wrap="square" lIns="457200" tIns="109728"/>
           <a:lstStyle/>
           <a:p>
             <a:pPr algn="ctr">
-              <a:defRPr sz="1600" b="1">
-                <a:solidFill>
-                  <a:srgbClr val="0F2537"/>
-                </a:solidFill>
-              </a:defRPr>
-            </a:pPr>
-            <a:r>
-              <a:t>Competências Técnicas</a:t>
-            </a:r>
-          </a:p>
-          <a:p>
-            <a:pPr>
-              <a:spcBef>
-                <a:spcPts val="600"/>
-              </a:spcBef>
-              <a:defRPr sz="1150">
-                <a:solidFill>
-                  <a:srgbClr val="1E293B"/>
-                </a:solidFill>
-              </a:defRPr>
-            </a:pPr>
-            <a:r>
-              <a:t>•  Compreender a arquitetura interna de computadores para engenharia e oficinas MRO.</a:t>
-            </a:r>
-          </a:p>
-          <a:p>
-            <a:pPr>
-              <a:spcBef>
-                <a:spcPts val="600"/>
-              </a:spcBef>
-              <a:defRPr sz="1150">
-                <a:solidFill>
-                  <a:srgbClr val="1E293B"/>
-                </a:solidFill>
-              </a:defRPr>
-            </a:pPr>
-            <a:r>
-              <a:t>•  Diferenciar o papel operacional de CPU, Memória RAM, Armazenamento NVMe e GPU.</a:t>
-            </a:r>
-          </a:p>
-          <a:p>
-            <a:pPr>
-              <a:spcBef>
-                <a:spcPts val="600"/>
-              </a:spcBef>
-              <a:defRPr sz="1150">
-                <a:solidFill>
-                  <a:srgbClr val="1E293B"/>
-                </a:solidFill>
-              </a:defRPr>
-            </a:pPr>
-            <a:r>
-              <a:t>•  Avaliar e diagnosticar gargalos de desempenho em estações de trabalho.</a:t>
-            </a:r>
-          </a:p>
-          <a:p>
-            <a:pPr>
-              <a:spcBef>
-                <a:spcPts val="600"/>
-              </a:spcBef>
-              <a:defRPr sz="1150">
-                <a:solidFill>
-                  <a:srgbClr val="1E293B"/>
-                </a:solidFill>
-              </a:defRPr>
-            </a:pPr>
-            <a:r>
-              <a:t>•  Dimensionar e justificar tecnicamente configurações computacionais para cada perfil de uso.</a:t>
-            </a:r>
-          </a:p>
-        </p:txBody>
-      </p:sp>
-      <p:sp>
-        <p:nvSpPr>
-          <p:cNvPr id="4" name="Rounded Rectangle 3"/>
-          <p:cNvSpPr/>
-          <p:nvPr/>
-        </p:nvSpPr>
-        <p:spPr>
-          <a:xfrm>
-            <a:off x="6263640" y="1554480"/>
-            <a:ext cx="5166360" cy="4480560"/>
-          </a:xfrm>
-          <a:prstGeom prst="roundRect">
-            <a:avLst/>
-          </a:prstGeom>
-          <a:solidFill>
-            <a:srgbClr val="FFFFFF"/>
-          </a:solidFill>
-          <a:ln w="12700">
-            <a:solidFill>
-              <a:srgbClr val="CBD5E1"/>
-            </a:solidFill>
-          </a:ln>
-        </p:spPr>
-        <p:style>
-          <a:lnRef idx="1">
-            <a:schemeClr val="accent1"/>
-          </a:lnRef>
-          <a:fillRef idx="3">
-            <a:schemeClr val="accent1"/>
-          </a:fillRef>
-          <a:effectRef idx="2">
-            <a:schemeClr val="accent1"/>
-          </a:effectRef>
-          <a:fontRef idx="minor">
-            <a:schemeClr val="lt1"/>
-          </a:fontRef>
-        </p:style>
-        <p:txBody>
-          <a:bodyPr rtlCol="0" anchor="ctr" wrap="square" lIns="274320" rIns="274320" tIns="274320"/>
-          <a:lstStyle/>
-          <a:p>
-            <a:pPr algn="ctr">
-              <a:defRPr sz="1600" b="1">
-                <a:solidFill>
-                  <a:srgbClr val="0284C7"/>
-                </a:solidFill>
-              </a:defRPr>
-            </a:pPr>
-            <a:r>
-              <a:t>Contextualização Aeronáutica</a:t>
-            </a:r>
-          </a:p>
-          <a:p>
-            <a:pPr>
-              <a:spcBef>
-                <a:spcPts val="600"/>
-              </a:spcBef>
-              <a:defRPr sz="1150">
-                <a:solidFill>
-                  <a:srgbClr val="1E293B"/>
-                </a:solidFill>
-              </a:defRPr>
-            </a:pPr>
-            <a:r>
-              <a:t>•  Manipulação de manuais digitais pesados (AMM, IPC, SRM com mais de 3.000 páginas em PDF).</a:t>
-            </a:r>
-          </a:p>
-          <a:p>
-            <a:pPr>
-              <a:spcBef>
-                <a:spcPts val="600"/>
-              </a:spcBef>
-              <a:defRPr sz="1150">
-                <a:solidFill>
-                  <a:srgbClr val="1E293B"/>
-                </a:solidFill>
-              </a:defRPr>
-            </a:pPr>
-            <a:r>
-              <a:t>•  Processamento de bases de dados de voo, diários de bordo e confiabilidade de frotas.</a:t>
-            </a:r>
-          </a:p>
-          <a:p>
-            <a:pPr>
-              <a:spcBef>
-                <a:spcPts val="600"/>
-              </a:spcBef>
-              <a:defRPr sz="1150">
-                <a:solidFill>
-                  <a:srgbClr val="1E293B"/>
-                </a:solidFill>
-              </a:defRPr>
-            </a:pPr>
-            <a:r>
-              <a:t>•  Execução de planilhas de grande porte com fórmulas matriciais e redes PERT/CPM.</a:t>
-            </a:r>
-          </a:p>
-          <a:p>
-            <a:pPr>
-              <a:spcBef>
-                <a:spcPts val="600"/>
-              </a:spcBef>
-              <a:defRPr sz="1150">
-                <a:solidFill>
-                  <a:srgbClr val="1E293B"/>
-                </a:solidFill>
-              </a:defRPr>
-            </a:pPr>
-            <a:r>
-              <a:t>•  Integração com estações de teste e ferramentas de bancada informatizadas.</a:t>
-            </a:r>
-          </a:p>
-        </p:txBody>
-      </p:sp>
-      <p:sp>
-        <p:nvSpPr>
-          <p:cNvPr id="5" name="TextBox 4"/>
+              <a:defRPr sz="900" b="1">
+                <a:solidFill>
+                  <a:srgbClr val="0072CE"/>
+                </a:solidFill>
+                <a:latin typeface="Arial"/>
+              </a:defRPr>
+            </a:pPr>
+            <a:r>
+              <a:t>INF-117 — INFORMÁTICA APLICADA A AERONÁUTICA</a:t>
+            </a:r>
+          </a:p>
+          <a:p>
+            <a:pPr>
+              <a:defRPr sz="1800" b="1">
+                <a:solidFill>
+                  <a:srgbClr val="FFFFFF"/>
+                </a:solidFill>
+                <a:latin typeface="Arial"/>
+              </a:defRPr>
+            </a:pPr>
+            <a:r>
+              <a:t>Objetivos de Aprendizagem</a:t>
+            </a:r>
+          </a:p>
+        </p:txBody>
+      </p:sp>
+      <p:sp>
+        <p:nvSpPr>
+          <p:cNvPr id="3" name="TextBox 2"/>
           <p:cNvSpPr txBox="1"/>
           <p:nvPr/>
         </p:nvSpPr>
         <p:spPr>
           <a:xfrm>
-            <a:off x="731520" y="6309360"/>
-            <a:ext cx="10728655" cy="365760"/>
+            <a:off x="457200" y="4800600"/>
+            <a:ext cx="8229600" cy="274320"/>
           </a:xfrm>
           <a:prstGeom prst="rect">
             <a:avLst/>
@@ -4237,7 +4248,7 @@
           <a:noFill/>
         </p:spPr>
         <p:txBody>
-          <a:bodyPr wrap="none" lIns="0" tIns="0" rIns="0" bIns="0">
+          <a:bodyPr wrap="none">
             <a:spAutoFit/>
           </a:bodyPr>
           <a:lstStyle/>
@@ -4245,12 +4256,161 @@
             <a:pPr>
               <a:defRPr sz="900">
                 <a:solidFill>
-                  <a:srgbClr val="64748B"/>
-                </a:solidFill>
-              </a:defRPr>
-            </a:pPr>
-            <a:r>
-              <a:t>Fatec Sorocaba — CST em Manutenção de Aeronaves  |  Prof. André Souza  |  Slide 2 de 11</a:t>
+                  <a:srgbClr val="5A5A5A"/>
+                </a:solidFill>
+                <a:latin typeface="Arial"/>
+              </a:defRPr>
+            </a:pPr>
+            <a:r>
+              <a:t>Fatec Sorocaba — CST em Manutenção de Aeronaves  |  Slide 2 de 12</a:t>
+            </a:r>
+          </a:p>
+        </p:txBody>
+      </p:sp>
+      <p:sp>
+        <p:nvSpPr>
+          <p:cNvPr id="4" name="TextBox 3"/>
+          <p:cNvSpPr txBox="1"/>
+          <p:nvPr/>
+        </p:nvSpPr>
+        <p:spPr>
+          <a:xfrm>
+            <a:off x="548640" y="1005840"/>
+            <a:ext cx="8046720" cy="3657600"/>
+          </a:xfrm>
+          <a:prstGeom prst="rect">
+            <a:avLst/>
+          </a:prstGeom>
+          <a:noFill/>
+        </p:spPr>
+        <p:txBody>
+          <a:bodyPr wrap="square">
+            <a:spAutoFit/>
+          </a:bodyPr>
+          <a:lstStyle/>
+          <a:p>
+            <a:pPr>
+              <a:spcBef>
+                <a:spcPts val="0"/>
+              </a:spcBef>
+            </a:pPr>
+            <a:r>
+              <a:rPr b="1" sz="1300">
+                <a:solidFill>
+                  <a:srgbClr val="0F2043"/>
+                </a:solidFill>
+                <a:latin typeface="Arial"/>
+              </a:rPr>
+              <a:t>•  Competências de Hardware:</a:t>
+            </a:r>
+            <a:r>
+              <a:rPr sz="1300">
+                <a:solidFill>
+                  <a:srgbClr val="282828"/>
+                </a:solidFill>
+                <a:latin typeface="Arial"/>
+              </a:rPr>
+              <a:t> Compreender a atuação da CPU, Memória RAM, SSD NVMe e GPU em sistemas computacionais aeronáuticos.</a:t>
+            </a:r>
+          </a:p>
+          <a:p>
+            <a:pPr>
+              <a:spcBef>
+                <a:spcPts val="1000"/>
+              </a:spcBef>
+            </a:pPr>
+            <a:r>
+              <a:rPr b="1" sz="1300">
+                <a:solidFill>
+                  <a:srgbClr val="0F2043"/>
+                </a:solidFill>
+                <a:latin typeface="Arial"/>
+              </a:rPr>
+              <a:t>•  Arquitetura de Armazenamento e Leitura:</a:t>
+            </a:r>
+            <a:r>
+              <a:rPr sz="1300">
+                <a:solidFill>
+                  <a:srgbClr val="282828"/>
+                </a:solidFill>
+                <a:latin typeface="Arial"/>
+              </a:rPr>
+              <a:t> Avaliar o impacto da velocidade de disco na abertura de manuais técnicos pesados (AMM, IPC, SRM com 3.000+ páginas em PDF) e arquivos CAD 3D.</a:t>
+            </a:r>
+          </a:p>
+          <a:p>
+            <a:pPr>
+              <a:spcBef>
+                <a:spcPts val="1000"/>
+              </a:spcBef>
+            </a:pPr>
+            <a:r>
+              <a:rPr b="1" sz="1300">
+                <a:solidFill>
+                  <a:srgbClr val="0F2043"/>
+                </a:solidFill>
+                <a:latin typeface="Arial"/>
+              </a:rPr>
+              <a:t>•  Dimensionamento Técnico por Perfil:</a:t>
+            </a:r>
+            <a:r>
+              <a:rPr sz="1300">
+                <a:solidFill>
+                  <a:srgbClr val="282828"/>
+                </a:solidFill>
+                <a:latin typeface="Arial"/>
+              </a:rPr>
+              <a:t> Especificar e justificar computadores adequados para dois ambientes distintos: Hangar/Oficina MRO vs. Engenharia/PCM.</a:t>
+            </a:r>
+          </a:p>
+          <a:p>
+            <a:pPr>
+              <a:spcBef>
+                <a:spcPts val="1000"/>
+              </a:spcBef>
+            </a:pPr>
+            <a:r>
+              <a:rPr b="1" sz="1300">
+                <a:solidFill>
+                  <a:srgbClr val="0F2043"/>
+                </a:solidFill>
+                <a:latin typeface="Arial"/>
+              </a:rPr>
+              <a:t>•  Diagnóstico Prático no Sistema Operacional:</a:t>
+            </a:r>
+            <a:r>
+              <a:rPr sz="1300">
+                <a:solidFill>
+                  <a:srgbClr val="282828"/>
+                </a:solidFill>
+                <a:latin typeface="Arial"/>
+              </a:rPr>
+              <a:t> Utilizar ferramentas do Windows 11 para identificar gargalos de hardware em tempo real.</a:t>
+            </a:r>
+          </a:p>
+          <a:p>
+            <a:pPr>
+              <a:spcBef>
+                <a:spcPts val="1000"/>
+              </a:spcBef>
+            </a:pPr>
+            <a:r>
+              <a:rPr b="1" sz="1300">
+                <a:solidFill>
+                  <a:srgbClr val="0F2043"/>
+                </a:solidFill>
+                <a:latin typeface="Arial"/>
+              </a:rPr>
+              <a:t>•  Visão de Fronteira Tecnológica (Computação Quântica):</a:t>
+            </a:r>
+            <a:r>
+              <a:rPr sz="1300">
+                <a:solidFill>
+                  <a:srgbClr val="282828"/>
+                </a:solidFill>
+                <a:latin typeface="Arial"/>
+              </a:rPr>
+              <a:t> Compreender conceitos básicos de qubits e superposição quântica aplicados ao setor aeroespacial.</a:t>
             </a:r>
           </a:p>
         </p:txBody>
@@ -4275,75 +4435,23 @@
       <p:grpSpPr/>
       <p:sp>
         <p:nvSpPr>
-          <p:cNvPr id="2" name="TextBox 1"/>
-          <p:cNvSpPr txBox="1"/>
+          <p:cNvPr id="2" name="Rectangle 1"/>
+          <p:cNvSpPr/>
           <p:nvPr/>
         </p:nvSpPr>
         <p:spPr>
           <a:xfrm>
-            <a:off x="731520" y="365760"/>
-            <a:ext cx="10728655" cy="1005840"/>
+            <a:off x="0" y="0"/>
+            <a:ext cx="9144000" cy="822960"/>
           </a:xfrm>
           <a:prstGeom prst="rect">
             <a:avLst/>
           </a:prstGeom>
-          <a:noFill/>
-        </p:spPr>
-        <p:txBody>
-          <a:bodyPr wrap="square" lIns="0" tIns="0" rIns="0" bIns="0">
-            <a:spAutoFit/>
-          </a:bodyPr>
-          <a:lstStyle/>
-          <a:p>
-            <a:pPr>
-              <a:defRPr sz="1100" b="1">
-                <a:solidFill>
-                  <a:srgbClr val="0284C7"/>
-                </a:solidFill>
-              </a:defRPr>
-            </a:pPr>
-            <a:r>
-              <a:t>INF-117 | INFORMÁTICA APLICADA A AERONÁUTICA</a:t>
-            </a:r>
-          </a:p>
-          <a:p>
-            <a:pPr>
-              <a:spcBef>
-                <a:spcPts val="300"/>
-              </a:spcBef>
-              <a:defRPr sz="2200" b="1">
-                <a:solidFill>
-                  <a:srgbClr val="0F2537"/>
-                </a:solidFill>
-              </a:defRPr>
-            </a:pPr>
-            <a:r>
-              <a:t>O Processador (CPU): O Cérebro do Sistema</a:t>
-            </a:r>
-          </a:p>
-        </p:txBody>
-      </p:sp>
-      <p:sp>
-        <p:nvSpPr>
-          <p:cNvPr id="3" name="Rounded Rectangle 2"/>
-          <p:cNvSpPr/>
-          <p:nvPr/>
-        </p:nvSpPr>
-        <p:spPr>
-          <a:xfrm>
-            <a:off x="731520" y="1554480"/>
-            <a:ext cx="5166360" cy="4480560"/>
-          </a:xfrm>
-          <a:prstGeom prst="roundRect">
-            <a:avLst/>
-          </a:prstGeom>
           <a:solidFill>
-            <a:srgbClr val="FFFFFF"/>
+            <a:srgbClr val="0F2043"/>
           </a:solidFill>
-          <a:ln w="12700">
-            <a:solidFill>
-              <a:srgbClr val="CBD5E1"/>
-            </a:solidFill>
+          <a:ln>
+            <a:noFill/>
           </a:ln>
         </p:spPr>
         <p:style>
@@ -4361,78 +4469,68 @@
           </a:fontRef>
         </p:style>
         <p:txBody>
-          <a:bodyPr rtlCol="0" anchor="ctr" wrap="square" lIns="274320" rIns="274320" tIns="274320"/>
+          <a:bodyPr rtlCol="0" anchor="ctr" wrap="square" lIns="457200" tIns="109728"/>
           <a:lstStyle/>
           <a:p>
             <a:pPr algn="ctr">
-              <a:defRPr sz="1600" b="1">
-                <a:solidFill>
-                  <a:srgbClr val="0F2537"/>
-                </a:solidFill>
-              </a:defRPr>
-            </a:pPr>
-            <a:r>
-              <a:t>Arquitetura e Características</a:t>
-            </a:r>
-          </a:p>
-          <a:p>
-            <a:pPr>
-              <a:spcBef>
-                <a:spcPts val="600"/>
-              </a:spcBef>
-              <a:defRPr sz="1150">
-                <a:solidFill>
-                  <a:srgbClr val="1E293B"/>
-                </a:solidFill>
-              </a:defRPr>
-            </a:pPr>
-            <a:r>
-              <a:t>•  Unidade Central de Processamento (Central Processing Unit).</a:t>
-            </a:r>
-          </a:p>
-          <a:p>
-            <a:pPr>
-              <a:spcBef>
-                <a:spcPts val="600"/>
-              </a:spcBef>
-              <a:defRPr sz="1150">
-                <a:solidFill>
-                  <a:srgbClr val="1E293B"/>
-                </a:solidFill>
-              </a:defRPr>
-            </a:pPr>
-            <a:r>
-              <a:t>•  Núcleos (Cores) e Threads: Execução de múltiplas instruções em paralelo.</a:t>
-            </a:r>
-          </a:p>
-          <a:p>
-            <a:pPr>
-              <a:spcBef>
-                <a:spcPts val="600"/>
-              </a:spcBef>
-              <a:defRPr sz="1150">
-                <a:solidFill>
-                  <a:srgbClr val="1E293B"/>
-                </a:solidFill>
-              </a:defRPr>
-            </a:pPr>
-            <a:r>
-              <a:t>•  Frequência de Clock (GHz): Velocidade com que cada instrução é calculada.</a:t>
-            </a:r>
-          </a:p>
-          <a:p>
-            <a:pPr>
-              <a:spcBef>
-                <a:spcPts val="600"/>
-              </a:spcBef>
-              <a:defRPr sz="1150">
-                <a:solidFill>
-                  <a:srgbClr val="1E293B"/>
-                </a:solidFill>
-              </a:defRPr>
-            </a:pPr>
-            <a:r>
-              <a:t>•  Memória Cache (L1, L2, L3): Memória interna ultrarrápida que reduz o acesso à RAM.</a:t>
+              <a:defRPr sz="900" b="1">
+                <a:solidFill>
+                  <a:srgbClr val="0072CE"/>
+                </a:solidFill>
+                <a:latin typeface="Arial"/>
+              </a:defRPr>
+            </a:pPr>
+            <a:r>
+              <a:t>INF-117 — INFORMÁTICA APLICADA A AERONÁUTICA</a:t>
+            </a:r>
+          </a:p>
+          <a:p>
+            <a:pPr>
+              <a:defRPr sz="1800" b="1">
+                <a:solidFill>
+                  <a:srgbClr val="FFFFFF"/>
+                </a:solidFill>
+                <a:latin typeface="Arial"/>
+              </a:defRPr>
+            </a:pPr>
+            <a:r>
+              <a:t>Fundamentos — Hardware vs. Software na Aviação</a:t>
+            </a:r>
+          </a:p>
+        </p:txBody>
+      </p:sp>
+      <p:sp>
+        <p:nvSpPr>
+          <p:cNvPr id="3" name="TextBox 2"/>
+          <p:cNvSpPr txBox="1"/>
+          <p:nvPr/>
+        </p:nvSpPr>
+        <p:spPr>
+          <a:xfrm>
+            <a:off x="457200" y="4800600"/>
+            <a:ext cx="8229600" cy="274320"/>
+          </a:xfrm>
+          <a:prstGeom prst="rect">
+            <a:avLst/>
+          </a:prstGeom>
+          <a:noFill/>
+        </p:spPr>
+        <p:txBody>
+          <a:bodyPr wrap="none">
+            <a:spAutoFit/>
+          </a:bodyPr>
+          <a:lstStyle/>
+          <a:p>
+            <a:pPr>
+              <a:defRPr sz="900">
+                <a:solidFill>
+                  <a:srgbClr val="5A5A5A"/>
+                </a:solidFill>
+                <a:latin typeface="Arial"/>
+              </a:defRPr>
+            </a:pPr>
+            <a:r>
+              <a:t>Fatec Sorocaba — CST em Manutenção de Aeronaves  |  Slide 3 de 12</a:t>
             </a:r>
           </a:p>
         </p:txBody>
@@ -4445,18 +4543,18 @@
         </p:nvSpPr>
         <p:spPr>
           <a:xfrm>
-            <a:off x="6263640" y="1554480"/>
-            <a:ext cx="5166360" cy="4480560"/>
+            <a:off x="548640" y="1097280"/>
+            <a:ext cx="2560320" cy="3474720"/>
           </a:xfrm>
           <a:prstGeom prst="roundRect">
             <a:avLst/>
           </a:prstGeom>
           <a:solidFill>
-            <a:srgbClr val="FFFFFF"/>
+            <a:srgbClr val="E6F0FA"/>
           </a:solidFill>
-          <a:ln w="12700">
+          <a:ln>
             <a:solidFill>
-              <a:srgbClr val="CBD5E1"/>
+              <a:srgbClr val="D2DCE6"/>
             </a:solidFill>
           </a:ln>
         </p:spPr>
@@ -4475,79 +4573,10 @@
           </a:fontRef>
         </p:style>
         <p:txBody>
-          <a:bodyPr rtlCol="0" anchor="ctr" wrap="square" lIns="274320" rIns="274320" tIns="274320"/>
-          <a:lstStyle/>
-          <a:p>
-            <a:pPr algn="ctr">
-              <a:defRPr sz="1600" b="1">
-                <a:solidFill>
-                  <a:srgbClr val="0284C7"/>
-                </a:solidFill>
-              </a:defRPr>
-            </a:pPr>
-            <a:r>
-              <a:t>Impacto na Rotina de Manutenção</a:t>
-            </a:r>
-          </a:p>
-          <a:p>
-            <a:pPr>
-              <a:spcBef>
-                <a:spcPts val="600"/>
-              </a:spcBef>
-              <a:defRPr sz="1150">
-                <a:solidFill>
-                  <a:srgbClr val="1E293B"/>
-                </a:solidFill>
-              </a:defRPr>
-            </a:pPr>
-            <a:r>
-              <a:t>•  Processamento de planilhas complexas com milhares de fórmulas interdependentes.</a:t>
-            </a:r>
-          </a:p>
-          <a:p>
-            <a:pPr>
-              <a:spcBef>
-                <a:spcPts val="600"/>
-              </a:spcBef>
-              <a:defRPr sz="1150">
-                <a:solidFill>
-                  <a:srgbClr val="1E293B"/>
-                </a:solidFill>
-              </a:defRPr>
-            </a:pPr>
-            <a:r>
-              <a:t>•  Cálculo do motor multithread do Excel (cálculo de caminhos críticos e matrizes).</a:t>
-            </a:r>
-          </a:p>
-          <a:p>
-            <a:pPr>
-              <a:spcBef>
-                <a:spcPts val="600"/>
-              </a:spcBef>
-              <a:defRPr sz="1150">
-                <a:solidFill>
-                  <a:srgbClr val="1E293B"/>
-                </a:solidFill>
-              </a:defRPr>
-            </a:pPr>
-            <a:r>
-              <a:t>•  Renderização rápida de desenhos técnicos em 2D/3D no AutoCAD/CAD.</a:t>
-            </a:r>
-          </a:p>
-          <a:p>
-            <a:pPr>
-              <a:spcBef>
-                <a:spcPts val="600"/>
-              </a:spcBef>
-              <a:defRPr sz="1150">
-                <a:solidFill>
-                  <a:srgbClr val="1E293B"/>
-                </a:solidFill>
-              </a:defRPr>
-            </a:pPr>
-            <a:r>
-              <a:t>•  Recomendação mínima: Processadores de 6 a 8 núcleos (Intel Core i7 / AMD Ryzen 7).</a:t>
-            </a:r>
+          <a:bodyPr rtlCol="0" anchor="ctr"/>
+          <a:lstStyle/>
+          <a:p>
+            <a:pPr algn="ctr"/>
           </a:p>
         </p:txBody>
       </p:sp>
@@ -4559,8 +4588,8 @@
         </p:nvSpPr>
         <p:spPr>
           <a:xfrm>
-            <a:off x="731520" y="6309360"/>
-            <a:ext cx="10728655" cy="365760"/>
+            <a:off x="685800" y="1188720"/>
+            <a:ext cx="2286000" cy="3291840"/>
           </a:xfrm>
           <a:prstGeom prst="rect">
             <a:avLst/>
@@ -4568,20 +4597,450 @@
           <a:noFill/>
         </p:spPr>
         <p:txBody>
-          <a:bodyPr wrap="none" lIns="0" tIns="0" rIns="0" bIns="0">
+          <a:bodyPr wrap="square">
             <a:spAutoFit/>
           </a:bodyPr>
           <a:lstStyle/>
           <a:p>
             <a:pPr>
-              <a:defRPr sz="900">
-                <a:solidFill>
-                  <a:srgbClr val="64748B"/>
-                </a:solidFill>
-              </a:defRPr>
-            </a:pPr>
-            <a:r>
-              <a:t>Fatec Sorocaba — CST em Manutenção de Aeronaves  |  Prof. André Souza  |  Slide 3 de 11</a:t>
+              <a:defRPr b="1" sz="1200">
+                <a:solidFill>
+                  <a:srgbClr val="0F2043"/>
+                </a:solidFill>
+              </a:defRPr>
+            </a:pPr>
+            <a:r>
+              <a:t>HARDWARE AERONÁUTICO</a:t>
+            </a:r>
+          </a:p>
+          <a:p>
+            <a:pPr>
+              <a:spcBef>
+                <a:spcPts val="200"/>
+              </a:spcBef>
+              <a:defRPr sz="1000">
+                <a:solidFill>
+                  <a:srgbClr val="0072CE"/>
+                </a:solidFill>
+              </a:defRPr>
+            </a:pPr>
+            <a:r>
+              <a:t>A infraestrutura física</a:t>
+            </a:r>
+          </a:p>
+          <a:p>
+            <a:pPr>
+              <a:spcBef>
+                <a:spcPts val="600"/>
+              </a:spcBef>
+              <a:defRPr sz="1000">
+                <a:solidFill>
+                  <a:srgbClr val="282828"/>
+                </a:solidFill>
+              </a:defRPr>
+            </a:pPr>
+            <a:r>
+              <a:t>• Processadores (CPU) de alto desempenho</a:t>
+            </a:r>
+          </a:p>
+          <a:p>
+            <a:pPr>
+              <a:spcBef>
+                <a:spcPts val="600"/>
+              </a:spcBef>
+              <a:defRPr sz="1000">
+                <a:solidFill>
+                  <a:srgbClr val="282828"/>
+                </a:solidFill>
+              </a:defRPr>
+            </a:pPr>
+            <a:r>
+              <a:t>• Memórias RAM DDR4/DDR5 de alta frequência</a:t>
+            </a:r>
+          </a:p>
+          <a:p>
+            <a:pPr>
+              <a:spcBef>
+                <a:spcPts val="600"/>
+              </a:spcBef>
+              <a:defRPr sz="1000">
+                <a:solidFill>
+                  <a:srgbClr val="282828"/>
+                </a:solidFill>
+              </a:defRPr>
+            </a:pPr>
+            <a:r>
+              <a:t>• Armazenamento SSD NVMe PCIe ultra-rápido</a:t>
+            </a:r>
+          </a:p>
+          <a:p>
+            <a:pPr>
+              <a:spcBef>
+                <a:spcPts val="600"/>
+              </a:spcBef>
+              <a:defRPr sz="1000">
+                <a:solidFill>
+                  <a:srgbClr val="282828"/>
+                </a:solidFill>
+              </a:defRPr>
+            </a:pPr>
+            <a:r>
+              <a:t>• Placas de Vídeo (GPU) dedicadas para 3D/CAD</a:t>
+            </a:r>
+          </a:p>
+          <a:p>
+            <a:pPr>
+              <a:spcBef>
+                <a:spcPts val="600"/>
+              </a:spcBef>
+              <a:defRPr sz="1000">
+                <a:solidFill>
+                  <a:srgbClr val="282828"/>
+                </a:solidFill>
+              </a:defRPr>
+            </a:pPr>
+            <a:r>
+              <a:t>• Terminais industriais e monitores antirreflexo</a:t>
+            </a:r>
+          </a:p>
+        </p:txBody>
+      </p:sp>
+      <p:sp>
+        <p:nvSpPr>
+          <p:cNvPr id="6" name="Rounded Rectangle 5"/>
+          <p:cNvSpPr/>
+          <p:nvPr/>
+        </p:nvSpPr>
+        <p:spPr>
+          <a:xfrm>
+            <a:off x="3291840" y="1097280"/>
+            <a:ext cx="2560320" cy="3474720"/>
+          </a:xfrm>
+          <a:prstGeom prst="roundRect">
+            <a:avLst/>
+          </a:prstGeom>
+          <a:solidFill>
+            <a:srgbClr val="FFFFFF"/>
+          </a:solidFill>
+          <a:ln>
+            <a:solidFill>
+              <a:srgbClr val="D2DCE6"/>
+            </a:solidFill>
+          </a:ln>
+        </p:spPr>
+        <p:style>
+          <a:lnRef idx="1">
+            <a:schemeClr val="accent1"/>
+          </a:lnRef>
+          <a:fillRef idx="3">
+            <a:schemeClr val="accent1"/>
+          </a:fillRef>
+          <a:effectRef idx="2">
+            <a:schemeClr val="accent1"/>
+          </a:effectRef>
+          <a:fontRef idx="minor">
+            <a:schemeClr val="lt1"/>
+          </a:fontRef>
+        </p:style>
+        <p:txBody>
+          <a:bodyPr rtlCol="0" anchor="ctr"/>
+          <a:lstStyle/>
+          <a:p>
+            <a:pPr algn="ctr"/>
+          </a:p>
+        </p:txBody>
+      </p:sp>
+      <p:sp>
+        <p:nvSpPr>
+          <p:cNvPr id="7" name="TextBox 6"/>
+          <p:cNvSpPr txBox="1"/>
+          <p:nvPr/>
+        </p:nvSpPr>
+        <p:spPr>
+          <a:xfrm>
+            <a:off x="3429000" y="1188720"/>
+            <a:ext cx="2286000" cy="3291840"/>
+          </a:xfrm>
+          <a:prstGeom prst="rect">
+            <a:avLst/>
+          </a:prstGeom>
+          <a:noFill/>
+        </p:spPr>
+        <p:txBody>
+          <a:bodyPr wrap="square">
+            <a:spAutoFit/>
+          </a:bodyPr>
+          <a:lstStyle/>
+          <a:p>
+            <a:pPr>
+              <a:defRPr b="1" sz="1200">
+                <a:solidFill>
+                  <a:srgbClr val="0F2043"/>
+                </a:solidFill>
+              </a:defRPr>
+            </a:pPr>
+            <a:r>
+              <a:t>SOFTWARE DE SISTEMA</a:t>
+            </a:r>
+          </a:p>
+          <a:p>
+            <a:pPr>
+              <a:spcBef>
+                <a:spcPts val="200"/>
+              </a:spcBef>
+              <a:defRPr sz="1000">
+                <a:solidFill>
+                  <a:srgbClr val="0072CE"/>
+                </a:solidFill>
+              </a:defRPr>
+            </a:pPr>
+            <a:r>
+              <a:t>A camada de gerenciamento</a:t>
+            </a:r>
+          </a:p>
+          <a:p>
+            <a:pPr>
+              <a:spcBef>
+                <a:spcPts val="600"/>
+              </a:spcBef>
+              <a:defRPr sz="1000">
+                <a:solidFill>
+                  <a:srgbClr val="282828"/>
+                </a:solidFill>
+              </a:defRPr>
+            </a:pPr>
+            <a:r>
+              <a:t>• Sistemas Operacionais (Windows 11 / Linux)</a:t>
+            </a:r>
+          </a:p>
+          <a:p>
+            <a:pPr>
+              <a:spcBef>
+                <a:spcPts val="600"/>
+              </a:spcBef>
+              <a:defRPr sz="1000">
+                <a:solidFill>
+                  <a:srgbClr val="282828"/>
+                </a:solidFill>
+              </a:defRPr>
+            </a:pPr>
+            <a:r>
+              <a:t>• Gerenciamento de processos e alocação de RAM</a:t>
+            </a:r>
+          </a:p>
+          <a:p>
+            <a:pPr>
+              <a:spcBef>
+                <a:spcPts val="600"/>
+              </a:spcBef>
+              <a:defRPr sz="1000">
+                <a:solidFill>
+                  <a:srgbClr val="282828"/>
+                </a:solidFill>
+              </a:defRPr>
+            </a:pPr>
+            <a:r>
+              <a:t>• Drivers homologados e certificados para engenharia</a:t>
+            </a:r>
+          </a:p>
+          <a:p>
+            <a:pPr>
+              <a:spcBef>
+                <a:spcPts val="600"/>
+              </a:spcBef>
+              <a:defRPr sz="1000">
+                <a:solidFill>
+                  <a:srgbClr val="282828"/>
+                </a:solidFill>
+              </a:defRPr>
+            </a:pPr>
+            <a:r>
+              <a:t>• Segurança de dados e conectividade de rede MRO</a:t>
+            </a:r>
+          </a:p>
+          <a:p>
+            <a:pPr>
+              <a:spcBef>
+                <a:spcPts val="600"/>
+              </a:spcBef>
+              <a:defRPr sz="1000">
+                <a:solidFill>
+                  <a:srgbClr val="282828"/>
+                </a:solidFill>
+              </a:defRPr>
+            </a:pPr>
+            <a:r>
+              <a:t>• Gerenciamento de periféricos de teste</a:t>
+            </a:r>
+          </a:p>
+        </p:txBody>
+      </p:sp>
+      <p:sp>
+        <p:nvSpPr>
+          <p:cNvPr id="8" name="Rounded Rectangle 7"/>
+          <p:cNvSpPr/>
+          <p:nvPr/>
+        </p:nvSpPr>
+        <p:spPr>
+          <a:xfrm>
+            <a:off x="6035040" y="1097280"/>
+            <a:ext cx="2560320" cy="3474720"/>
+          </a:xfrm>
+          <a:prstGeom prst="roundRect">
+            <a:avLst/>
+          </a:prstGeom>
+          <a:solidFill>
+            <a:srgbClr val="E6F0FA"/>
+          </a:solidFill>
+          <a:ln>
+            <a:solidFill>
+              <a:srgbClr val="D2DCE6"/>
+            </a:solidFill>
+          </a:ln>
+        </p:spPr>
+        <p:style>
+          <a:lnRef idx="1">
+            <a:schemeClr val="accent1"/>
+          </a:lnRef>
+          <a:fillRef idx="3">
+            <a:schemeClr val="accent1"/>
+          </a:fillRef>
+          <a:effectRef idx="2">
+            <a:schemeClr val="accent1"/>
+          </a:effectRef>
+          <a:fontRef idx="minor">
+            <a:schemeClr val="lt1"/>
+          </a:fontRef>
+        </p:style>
+        <p:txBody>
+          <a:bodyPr rtlCol="0" anchor="ctr"/>
+          <a:lstStyle/>
+          <a:p>
+            <a:pPr algn="ctr"/>
+          </a:p>
+        </p:txBody>
+      </p:sp>
+      <p:sp>
+        <p:nvSpPr>
+          <p:cNvPr id="9" name="TextBox 8"/>
+          <p:cNvSpPr txBox="1"/>
+          <p:nvPr/>
+        </p:nvSpPr>
+        <p:spPr>
+          <a:xfrm>
+            <a:off x="6172200" y="1188720"/>
+            <a:ext cx="2286000" cy="3291840"/>
+          </a:xfrm>
+          <a:prstGeom prst="rect">
+            <a:avLst/>
+          </a:prstGeom>
+          <a:noFill/>
+        </p:spPr>
+        <p:txBody>
+          <a:bodyPr wrap="square">
+            <a:spAutoFit/>
+          </a:bodyPr>
+          <a:lstStyle/>
+          <a:p>
+            <a:pPr>
+              <a:defRPr b="1" sz="1200">
+                <a:solidFill>
+                  <a:srgbClr val="0F2043"/>
+                </a:solidFill>
+              </a:defRPr>
+            </a:pPr>
+            <a:r>
+              <a:t>SOFTWARE DE APLICAÇÃO</a:t>
+            </a:r>
+          </a:p>
+          <a:p>
+            <a:pPr>
+              <a:spcBef>
+                <a:spcPts val="200"/>
+              </a:spcBef>
+              <a:defRPr sz="1000">
+                <a:solidFill>
+                  <a:srgbClr val="0072CE"/>
+                </a:solidFill>
+              </a:defRPr>
+            </a:pPr>
+            <a:r>
+              <a:t>As ferramentas de trabalho</a:t>
+            </a:r>
+          </a:p>
+          <a:p>
+            <a:pPr>
+              <a:spcBef>
+                <a:spcPts val="600"/>
+              </a:spcBef>
+              <a:defRPr sz="1000">
+                <a:solidFill>
+                  <a:srgbClr val="282828"/>
+                </a:solidFill>
+              </a:defRPr>
+            </a:pPr>
+            <a:r>
+              <a:t>• MS Excel (Modelos de $CG$, PERT/CPM e Confiabilidade)</a:t>
+            </a:r>
+          </a:p>
+          <a:p>
+            <a:pPr>
+              <a:spcBef>
+                <a:spcPts val="600"/>
+              </a:spcBef>
+              <a:defRPr sz="1000">
+                <a:solidFill>
+                  <a:srgbClr val="282828"/>
+                </a:solidFill>
+              </a:defRPr>
+            </a:pPr>
+            <a:r>
+              <a:t>• MS Word (Relatórios Técnicos e OS padronizadas)</a:t>
+            </a:r>
+          </a:p>
+          <a:p>
+            <a:pPr>
+              <a:spcBef>
+                <a:spcPts val="600"/>
+              </a:spcBef>
+              <a:defRPr sz="1000">
+                <a:solidFill>
+                  <a:srgbClr val="282828"/>
+                </a:solidFill>
+              </a:defRPr>
+            </a:pPr>
+            <a:r>
+              <a:t>• Softwares CAD (AutoCAD, SolidWorks, CATIA 3D)</a:t>
+            </a:r>
+          </a:p>
+          <a:p>
+            <a:pPr>
+              <a:spcBef>
+                <a:spcPts val="600"/>
+              </a:spcBef>
+              <a:defRPr sz="1000">
+                <a:solidFill>
+                  <a:srgbClr val="282828"/>
+                </a:solidFill>
+              </a:defRPr>
+            </a:pPr>
+            <a:r>
+              <a:t>• Leitores de Manuais (PDF Vetorial AMM/IPC/SRM)</a:t>
+            </a:r>
+          </a:p>
+          <a:p>
+            <a:pPr>
+              <a:spcBef>
+                <a:spcPts val="600"/>
+              </a:spcBef>
+              <a:defRPr sz="1000">
+                <a:solidFill>
+                  <a:srgbClr val="282828"/>
+                </a:solidFill>
+              </a:defRPr>
+            </a:pPr>
+            <a:r>
+              <a:t>• Sistemas ERP/MRO (TRAX, AMOS, SAP Aviation)</a:t>
             </a:r>
           </a:p>
         </p:txBody>
@@ -4606,75 +5065,23 @@
       <p:grpSpPr/>
       <p:sp>
         <p:nvSpPr>
-          <p:cNvPr id="2" name="TextBox 1"/>
-          <p:cNvSpPr txBox="1"/>
+          <p:cNvPr id="2" name="Rectangle 1"/>
+          <p:cNvSpPr/>
           <p:nvPr/>
         </p:nvSpPr>
         <p:spPr>
           <a:xfrm>
-            <a:off x="731520" y="365760"/>
-            <a:ext cx="10728655" cy="1005840"/>
+            <a:off x="0" y="0"/>
+            <a:ext cx="9144000" cy="822960"/>
           </a:xfrm>
           <a:prstGeom prst="rect">
             <a:avLst/>
           </a:prstGeom>
-          <a:noFill/>
-        </p:spPr>
-        <p:txBody>
-          <a:bodyPr wrap="square" lIns="0" tIns="0" rIns="0" bIns="0">
-            <a:spAutoFit/>
-          </a:bodyPr>
-          <a:lstStyle/>
-          <a:p>
-            <a:pPr>
-              <a:defRPr sz="1100" b="1">
-                <a:solidFill>
-                  <a:srgbClr val="0284C7"/>
-                </a:solidFill>
-              </a:defRPr>
-            </a:pPr>
-            <a:r>
-              <a:t>INF-117 | INFORMÁTICA APLICADA A AERONÁUTICA</a:t>
-            </a:r>
-          </a:p>
-          <a:p>
-            <a:pPr>
-              <a:spcBef>
-                <a:spcPts val="300"/>
-              </a:spcBef>
-              <a:defRPr sz="2200" b="1">
-                <a:solidFill>
-                  <a:srgbClr val="0F2537"/>
-                </a:solidFill>
-              </a:defRPr>
-            </a:pPr>
-            <a:r>
-              <a:t>Memória RAM e Armazenamento SSD NVMe</a:t>
-            </a:r>
-          </a:p>
-        </p:txBody>
-      </p:sp>
-      <p:sp>
-        <p:nvSpPr>
-          <p:cNvPr id="3" name="Rounded Rectangle 2"/>
-          <p:cNvSpPr/>
-          <p:nvPr/>
-        </p:nvSpPr>
-        <p:spPr>
-          <a:xfrm>
-            <a:off x="731520" y="1554480"/>
-            <a:ext cx="5166360" cy="4480560"/>
-          </a:xfrm>
-          <a:prstGeom prst="roundRect">
-            <a:avLst/>
-          </a:prstGeom>
           <a:solidFill>
-            <a:srgbClr val="FFFFFF"/>
+            <a:srgbClr val="0F2043"/>
           </a:solidFill>
-          <a:ln w="12700">
-            <a:solidFill>
-              <a:srgbClr val="CBD5E1"/>
-            </a:solidFill>
+          <a:ln>
+            <a:noFill/>
           </a:ln>
         </p:spPr>
         <p:style>
@@ -4692,206 +5099,46 @@
           </a:fontRef>
         </p:style>
         <p:txBody>
-          <a:bodyPr rtlCol="0" anchor="ctr" wrap="square" lIns="274320" rIns="274320" tIns="274320"/>
+          <a:bodyPr rtlCol="0" anchor="ctr" wrap="square" lIns="457200" tIns="109728"/>
           <a:lstStyle/>
           <a:p>
             <a:pPr algn="ctr">
-              <a:defRPr sz="1600" b="1">
-                <a:solidFill>
-                  <a:srgbClr val="0F2537"/>
-                </a:solidFill>
-              </a:defRPr>
-            </a:pPr>
-            <a:r>
-              <a:t>Memória RAM (Volátil)</a:t>
-            </a:r>
-          </a:p>
-          <a:p>
-            <a:pPr>
-              <a:spcBef>
-                <a:spcPts val="600"/>
-              </a:spcBef>
-              <a:defRPr sz="1150">
-                <a:solidFill>
-                  <a:srgbClr val="1E293B"/>
-                </a:solidFill>
-              </a:defRPr>
-            </a:pPr>
-            <a:r>
-              <a:t>•  Armazena temporariamente os programas e arquivos enquanto estão em execução.</a:t>
-            </a:r>
-          </a:p>
-          <a:p>
-            <a:pPr>
-              <a:spcBef>
-                <a:spcPts val="600"/>
-              </a:spcBef>
-              <a:defRPr sz="1150">
-                <a:solidFill>
-                  <a:srgbClr val="1E293B"/>
-                </a:solidFill>
-              </a:defRPr>
-            </a:pPr>
-            <a:r>
-              <a:t>•  Capacidade recomendada: 16 GB a 32 GB DDR4/DDR5.</a:t>
-            </a:r>
-          </a:p>
-          <a:p>
-            <a:pPr>
-              <a:spcBef>
-                <a:spcPts val="600"/>
-              </a:spcBef>
-              <a:defRPr sz="1150">
-                <a:solidFill>
-                  <a:srgbClr val="1E293B"/>
-                </a:solidFill>
-              </a:defRPr>
-            </a:pPr>
-            <a:r>
-              <a:t>•  Sem RAM suficiente, o Windows usa o disco como memória virtual (Paging File), gerando lentidão extrema.</a:t>
-            </a:r>
-          </a:p>
-          <a:p>
-            <a:pPr>
-              <a:spcBef>
-                <a:spcPts val="600"/>
-              </a:spcBef>
-              <a:defRPr sz="1150">
-                <a:solidFill>
-                  <a:srgbClr val="1E293B"/>
-                </a:solidFill>
-              </a:defRPr>
-            </a:pPr>
-            <a:r>
-              <a:t>•  Permite manter abertos simultaneamente o Excel, Word, leitor de PDF e ERP de manutenção.</a:t>
-            </a:r>
-          </a:p>
-        </p:txBody>
-      </p:sp>
-      <p:sp>
-        <p:nvSpPr>
-          <p:cNvPr id="4" name="Rounded Rectangle 3"/>
-          <p:cNvSpPr/>
-          <p:nvPr/>
-        </p:nvSpPr>
-        <p:spPr>
-          <a:xfrm>
-            <a:off x="6263640" y="1554480"/>
-            <a:ext cx="5166360" cy="4480560"/>
-          </a:xfrm>
-          <a:prstGeom prst="roundRect">
-            <a:avLst/>
-          </a:prstGeom>
-          <a:solidFill>
-            <a:srgbClr val="FFFFFF"/>
-          </a:solidFill>
-          <a:ln w="12700">
-            <a:solidFill>
-              <a:srgbClr val="CBD5E1"/>
-            </a:solidFill>
-          </a:ln>
-        </p:spPr>
-        <p:style>
-          <a:lnRef idx="1">
-            <a:schemeClr val="accent1"/>
-          </a:lnRef>
-          <a:fillRef idx="3">
-            <a:schemeClr val="accent1"/>
-          </a:fillRef>
-          <a:effectRef idx="2">
-            <a:schemeClr val="accent1"/>
-          </a:effectRef>
-          <a:fontRef idx="minor">
-            <a:schemeClr val="lt1"/>
-          </a:fontRef>
-        </p:style>
-        <p:txBody>
-          <a:bodyPr rtlCol="0" anchor="ctr" wrap="square" lIns="274320" rIns="274320" tIns="274320"/>
-          <a:lstStyle/>
-          <a:p>
-            <a:pPr algn="ctr">
-              <a:defRPr sz="1600" b="1">
-                <a:solidFill>
-                  <a:srgbClr val="0284C7"/>
-                </a:solidFill>
-              </a:defRPr>
-            </a:pPr>
-            <a:r>
-              <a:t>Armazenamento SSD NVMe (Persistente)</a:t>
-            </a:r>
-          </a:p>
-          <a:p>
-            <a:pPr>
-              <a:spcBef>
-                <a:spcPts val="600"/>
-              </a:spcBef>
-              <a:defRPr sz="1150">
-                <a:solidFill>
-                  <a:srgbClr val="1E293B"/>
-                </a:solidFill>
-              </a:defRPr>
-            </a:pPr>
-            <a:r>
-              <a:t>•  Substitui definitivamente os antigos HDDs mecânicos de 5.400 / 7.200 RPM.</a:t>
-            </a:r>
-          </a:p>
-          <a:p>
-            <a:pPr>
-              <a:spcBef>
-                <a:spcPts val="600"/>
-              </a:spcBef>
-              <a:defRPr sz="1150">
-                <a:solidFill>
-                  <a:srgbClr val="1E293B"/>
-                </a:solidFill>
-              </a:defRPr>
-            </a:pPr>
-            <a:r>
-              <a:t>•  Taxas de leitura: SSD NVMe PCIe 4.0 atinge 5.000 a 7.000 MB/s (contra 150 MB/s do HDD).</a:t>
-            </a:r>
-          </a:p>
-          <a:p>
-            <a:pPr>
-              <a:spcBef>
-                <a:spcPts val="600"/>
-              </a:spcBef>
-              <a:defRPr sz="1150">
-                <a:solidFill>
-                  <a:srgbClr val="1E293B"/>
-                </a:solidFill>
-              </a:defRPr>
-            </a:pPr>
-            <a:r>
-              <a:t>•  Abertura instantânea do Windows e carregamento de catálogos pesados em segundos.</a:t>
-            </a:r>
-          </a:p>
-          <a:p>
-            <a:pPr>
-              <a:spcBef>
-                <a:spcPts val="600"/>
-              </a:spcBef>
-              <a:defRPr sz="1150">
-                <a:solidFill>
-                  <a:srgbClr val="1E293B"/>
-                </a:solidFill>
-              </a:defRPr>
-            </a:pPr>
-            <a:r>
-              <a:t>•  Resistente a choques e vibrações mecânicas em ambientes de hangar.</a:t>
-            </a:r>
-          </a:p>
-        </p:txBody>
-      </p:sp>
-      <p:sp>
-        <p:nvSpPr>
-          <p:cNvPr id="5" name="TextBox 4"/>
+              <a:defRPr sz="900" b="1">
+                <a:solidFill>
+                  <a:srgbClr val="0072CE"/>
+                </a:solidFill>
+                <a:latin typeface="Arial"/>
+              </a:defRPr>
+            </a:pPr>
+            <a:r>
+              <a:t>INF-117 — INFORMÁTICA APLICADA A AERONÁUTICA</a:t>
+            </a:r>
+          </a:p>
+          <a:p>
+            <a:pPr>
+              <a:defRPr sz="1800" b="1">
+                <a:solidFill>
+                  <a:srgbClr val="FFFFFF"/>
+                </a:solidFill>
+                <a:latin typeface="Arial"/>
+              </a:defRPr>
+            </a:pPr>
+            <a:r>
+              <a:t>O Processador (CPU): O Cérebro do Sistema</a:t>
+            </a:r>
+          </a:p>
+        </p:txBody>
+      </p:sp>
+      <p:sp>
+        <p:nvSpPr>
+          <p:cNvPr id="3" name="TextBox 2"/>
           <p:cNvSpPr txBox="1"/>
           <p:nvPr/>
         </p:nvSpPr>
         <p:spPr>
           <a:xfrm>
-            <a:off x="731520" y="6309360"/>
-            <a:ext cx="10728655" cy="365760"/>
+            <a:off x="457200" y="4800600"/>
+            <a:ext cx="8229600" cy="274320"/>
           </a:xfrm>
           <a:prstGeom prst="rect">
             <a:avLst/>
@@ -4899,7 +5146,7 @@
           <a:noFill/>
         </p:spPr>
         <p:txBody>
-          <a:bodyPr wrap="none" lIns="0" tIns="0" rIns="0" bIns="0">
+          <a:bodyPr wrap="none">
             <a:spAutoFit/>
           </a:bodyPr>
           <a:lstStyle/>
@@ -4907,16 +5154,179 @@
             <a:pPr>
               <a:defRPr sz="900">
                 <a:solidFill>
-                  <a:srgbClr val="64748B"/>
-                </a:solidFill>
-              </a:defRPr>
-            </a:pPr>
-            <a:r>
-              <a:t>Fatec Sorocaba — CST em Manutenção de Aeronaves  |  Prof. André Souza  |  Slide 4 de 11</a:t>
-            </a:r>
-          </a:p>
-        </p:txBody>
-      </p:sp>
+                  <a:srgbClr val="5A5A5A"/>
+                </a:solidFill>
+                <a:latin typeface="Arial"/>
+              </a:defRPr>
+            </a:pPr>
+            <a:r>
+              <a:t>Fatec Sorocaba — CST em Manutenção de Aeronaves  |  Slide 4 de 12</a:t>
+            </a:r>
+          </a:p>
+        </p:txBody>
+      </p:sp>
+      <p:sp>
+        <p:nvSpPr>
+          <p:cNvPr id="4" name="TextBox 3"/>
+          <p:cNvSpPr txBox="1"/>
+          <p:nvPr/>
+        </p:nvSpPr>
+        <p:spPr>
+          <a:xfrm>
+            <a:off x="548640" y="1005840"/>
+            <a:ext cx="4206240" cy="3657600"/>
+          </a:xfrm>
+          <a:prstGeom prst="rect">
+            <a:avLst/>
+          </a:prstGeom>
+          <a:noFill/>
+        </p:spPr>
+        <p:txBody>
+          <a:bodyPr wrap="square">
+            <a:spAutoFit/>
+          </a:bodyPr>
+          <a:lstStyle/>
+          <a:p>
+            <a:pPr>
+              <a:spcBef>
+                <a:spcPts val="0"/>
+              </a:spcBef>
+            </a:pPr>
+            <a:r>
+              <a:rPr b="1" sz="1200">
+                <a:solidFill>
+                  <a:srgbClr val="0F2043"/>
+                </a:solidFill>
+              </a:rPr>
+              <a:t>Arquitetura Interna:</a:t>
+            </a:r>
+            <a:r>
+              <a:rPr sz="1200">
+                <a:solidFill>
+                  <a:srgbClr val="282828"/>
+                </a:solidFill>
+              </a:rPr>
+              <a:t> Núcleos (Cores) executam tarefas independentes; Threads simulam núcleos virtuais para maior dinamismo.</a:t>
+            </a:r>
+          </a:p>
+          <a:p>
+            <a:pPr>
+              <a:spcBef>
+                <a:spcPts val="800"/>
+              </a:spcBef>
+            </a:pPr>
+            <a:r>
+              <a:rPr b="1" sz="1200">
+                <a:solidFill>
+                  <a:srgbClr val="0F2043"/>
+                </a:solidFill>
+              </a:rPr>
+              <a:t>Frequência de Clock (GHz):</a:t>
+            </a:r>
+            <a:r>
+              <a:rPr sz="1200">
+                <a:solidFill>
+                  <a:srgbClr val="282828"/>
+                </a:solidFill>
+              </a:rPr>
+              <a:t> Define a velocidade de ciclos por segundo. Clocks elevados (&gt;= 4.7 GHz) aceleram desenhos e cálculos individuais.</a:t>
+            </a:r>
+          </a:p>
+          <a:p>
+            <a:pPr>
+              <a:spcBef>
+                <a:spcPts val="800"/>
+              </a:spcBef>
+            </a:pPr>
+            <a:r>
+              <a:rPr b="1" sz="1200">
+                <a:solidFill>
+                  <a:srgbClr val="0F2043"/>
+                </a:solidFill>
+              </a:rPr>
+              <a:t>Memória Cache (L1/L2/L3):</a:t>
+            </a:r>
+            <a:r>
+              <a:rPr sz="1200">
+                <a:solidFill>
+                  <a:srgbClr val="282828"/>
+                </a:solidFill>
+              </a:rPr>
+              <a:t> Memória ultrarrápida dentro do chip da CPU que armazena instruções imediatas para evitar gargalos.</a:t>
+            </a:r>
+          </a:p>
+          <a:p>
+            <a:pPr>
+              <a:spcBef>
+                <a:spcPts val="800"/>
+              </a:spcBef>
+            </a:pPr>
+            <a:r>
+              <a:rPr b="1" sz="1200">
+                <a:solidFill>
+                  <a:srgbClr val="0F2043"/>
+                </a:solidFill>
+              </a:rPr>
+              <a:t>Impacto Direto no MS Excel:</a:t>
+            </a:r>
+            <a:r>
+              <a:rPr sz="1200">
+                <a:solidFill>
+                  <a:srgbClr val="282828"/>
+                </a:solidFill>
+              </a:rPr>
+              <a:t> O motor de cálculo do Excel utiliza múltiplos núcleos em paralelo para reavaliar planilhas com milhares de fórmulas matriciais e redes PERT/CPM.</a:t>
+            </a:r>
+          </a:p>
+          <a:p>
+            <a:pPr>
+              <a:spcBef>
+                <a:spcPts val="800"/>
+              </a:spcBef>
+            </a:pPr>
+            <a:r>
+              <a:rPr b="1" sz="1200">
+                <a:solidFill>
+                  <a:srgbClr val="0F2043"/>
+                </a:solidFill>
+              </a:rPr>
+              <a:t>Recomendação Técnica:</a:t>
+            </a:r>
+            <a:r>
+              <a:rPr sz="1200">
+                <a:solidFill>
+                  <a:srgbClr val="282828"/>
+                </a:solidFill>
+              </a:rPr>
+              <a:t> 6 a 8 núcleos (Intel Core i5/i7 ou AMD Ryzen 5/7).</a:t>
+            </a:r>
+          </a:p>
+        </p:txBody>
+      </p:sp>
+      <p:pic>
+        <p:nvPicPr>
+          <p:cNvPr id="5" name="Picture 4" descr="cpu.jpg"/>
+          <p:cNvPicPr>
+            <a:picLocks noChangeAspect="1"/>
+          </p:cNvPicPr>
+          <p:nvPr/>
+        </p:nvPicPr>
+        <p:blipFill>
+          <a:blip r:embed="rId2"/>
+          <a:stretch>
+            <a:fillRect/>
+          </a:stretch>
+        </p:blipFill>
+        <p:spPr>
+          <a:xfrm>
+            <a:off x="4937760" y="1097280"/>
+            <a:ext cx="3657600" cy="3474720"/>
+          </a:xfrm>
+          <a:prstGeom prst="rect">
+            <a:avLst/>
+          </a:prstGeom>
+        </p:spPr>
+      </p:pic>
     </p:spTree>
   </p:cSld>
   <p:clrMapOvr>
@@ -4937,75 +5347,23 @@
       <p:grpSpPr/>
       <p:sp>
         <p:nvSpPr>
-          <p:cNvPr id="2" name="TextBox 1"/>
-          <p:cNvSpPr txBox="1"/>
+          <p:cNvPr id="2" name="Rectangle 1"/>
+          <p:cNvSpPr/>
           <p:nvPr/>
         </p:nvSpPr>
         <p:spPr>
           <a:xfrm>
-            <a:off x="731520" y="365760"/>
-            <a:ext cx="10728655" cy="1005840"/>
+            <a:off x="0" y="0"/>
+            <a:ext cx="9144000" cy="822960"/>
           </a:xfrm>
           <a:prstGeom prst="rect">
             <a:avLst/>
           </a:prstGeom>
-          <a:noFill/>
-        </p:spPr>
-        <p:txBody>
-          <a:bodyPr wrap="square" lIns="0" tIns="0" rIns="0" bIns="0">
-            <a:spAutoFit/>
-          </a:bodyPr>
-          <a:lstStyle/>
-          <a:p>
-            <a:pPr>
-              <a:defRPr sz="1100" b="1">
-                <a:solidFill>
-                  <a:srgbClr val="0284C7"/>
-                </a:solidFill>
-              </a:defRPr>
-            </a:pPr>
-            <a:r>
-              <a:t>INF-117 | INFORMÁTICA APLICADA A AERONÁUTICA</a:t>
-            </a:r>
-          </a:p>
-          <a:p>
-            <a:pPr>
-              <a:spcBef>
-                <a:spcPts val="300"/>
-              </a:spcBef>
-              <a:defRPr sz="2200" b="1">
-                <a:solidFill>
-                  <a:srgbClr val="0F2537"/>
-                </a:solidFill>
-              </a:defRPr>
-            </a:pPr>
-            <a:r>
-              <a:t>Processamento Gráfico (GPU) e Periféricos de Entrada/Saída</a:t>
-            </a:r>
-          </a:p>
-        </p:txBody>
-      </p:sp>
-      <p:sp>
-        <p:nvSpPr>
-          <p:cNvPr id="3" name="Rounded Rectangle 2"/>
-          <p:cNvSpPr/>
-          <p:nvPr/>
-        </p:nvSpPr>
-        <p:spPr>
-          <a:xfrm>
-            <a:off x="731520" y="1554480"/>
-            <a:ext cx="5166360" cy="4480560"/>
-          </a:xfrm>
-          <a:prstGeom prst="roundRect">
-            <a:avLst/>
-          </a:prstGeom>
           <a:solidFill>
-            <a:srgbClr val="FFFFFF"/>
+            <a:srgbClr val="0F2043"/>
           </a:solidFill>
-          <a:ln w="12700">
-            <a:solidFill>
-              <a:srgbClr val="CBD5E1"/>
-            </a:solidFill>
+          <a:ln>
+            <a:noFill/>
           </a:ln>
         </p:spPr>
         <p:style>
@@ -5023,191 +5381,46 @@
           </a:fontRef>
         </p:style>
         <p:txBody>
-          <a:bodyPr rtlCol="0" anchor="ctr" wrap="square" lIns="274320" rIns="274320" tIns="274320"/>
+          <a:bodyPr rtlCol="0" anchor="ctr" wrap="square" lIns="457200" tIns="109728"/>
           <a:lstStyle/>
           <a:p>
             <a:pPr algn="ctr">
-              <a:defRPr sz="1600" b="1">
-                <a:solidFill>
-                  <a:srgbClr val="0F2537"/>
-                </a:solidFill>
-              </a:defRPr>
-            </a:pPr>
-            <a:r>
-              <a:t>Placa de Vídeo Dedicada (GPU)</a:t>
-            </a:r>
-          </a:p>
-          <a:p>
-            <a:pPr>
-              <a:spcBef>
-                <a:spcPts val="600"/>
-              </a:spcBef>
-              <a:defRPr sz="1150">
-                <a:solidFill>
-                  <a:srgbClr val="1E293B"/>
-                </a:solidFill>
-              </a:defRPr>
-            </a:pPr>
-            <a:r>
-              <a:t>•  Processamento gráfico paralelo com memória de vídeo dedicada (VRAM GDDR6).</a:t>
-            </a:r>
-          </a:p>
-          <a:p>
-            <a:pPr>
-              <a:spcBef>
-                <a:spcPts val="600"/>
-              </a:spcBef>
-              <a:defRPr sz="1150">
-                <a:solidFill>
-                  <a:srgbClr val="1E293B"/>
-                </a:solidFill>
-              </a:defRPr>
-            </a:pPr>
-            <a:r>
-              <a:t>•  Essencial para manipulação suave de modelos CAD 3D de aeronaves, motores e trens de pouso.</a:t>
-            </a:r>
-          </a:p>
-          <a:p>
-            <a:pPr>
-              <a:spcBef>
-                <a:spcPts val="600"/>
-              </a:spcBef>
-              <a:defRPr sz="1150">
-                <a:solidFill>
-                  <a:srgbClr val="1E293B"/>
-                </a:solidFill>
-              </a:defRPr>
-            </a:pPr>
-            <a:r>
-              <a:t>•  Aceleração de renderização de esquemáticos elétricos e hidráulicos complexos.</a:t>
-            </a:r>
-          </a:p>
-          <a:p>
-            <a:pPr>
-              <a:spcBef>
-                <a:spcPts val="600"/>
-              </a:spcBef>
-              <a:defRPr sz="1150">
-                <a:solidFill>
-                  <a:srgbClr val="1E293B"/>
-                </a:solidFill>
-              </a:defRPr>
-            </a:pPr>
-            <a:r>
-              <a:t>•  Libera a CPU para se dedicar exclusivamente aos cálculos analíticos e lógicos.</a:t>
-            </a:r>
-          </a:p>
-        </p:txBody>
-      </p:sp>
-      <p:sp>
-        <p:nvSpPr>
-          <p:cNvPr id="4" name="Rounded Rectangle 3"/>
-          <p:cNvSpPr/>
-          <p:nvPr/>
-        </p:nvSpPr>
-        <p:spPr>
-          <a:xfrm>
-            <a:off x="6263640" y="1554480"/>
-            <a:ext cx="5166360" cy="4480560"/>
-          </a:xfrm>
-          <a:prstGeom prst="roundRect">
-            <a:avLst/>
-          </a:prstGeom>
-          <a:solidFill>
-            <a:srgbClr val="FFFFFF"/>
-          </a:solidFill>
-          <a:ln w="12700">
-            <a:solidFill>
-              <a:srgbClr val="CBD5E1"/>
-            </a:solidFill>
-          </a:ln>
-        </p:spPr>
-        <p:style>
-          <a:lnRef idx="1">
-            <a:schemeClr val="accent1"/>
-          </a:lnRef>
-          <a:fillRef idx="3">
-            <a:schemeClr val="accent1"/>
-          </a:fillRef>
-          <a:effectRef idx="2">
-            <a:schemeClr val="accent1"/>
-          </a:effectRef>
-          <a:fontRef idx="minor">
-            <a:schemeClr val="lt1"/>
-          </a:fontRef>
-        </p:style>
-        <p:txBody>
-          <a:bodyPr rtlCol="0" anchor="ctr" wrap="square" lIns="274320" rIns="274320" tIns="274320"/>
-          <a:lstStyle/>
-          <a:p>
-            <a:pPr algn="ctr">
-              <a:defRPr sz="1600" b="1">
-                <a:solidFill>
-                  <a:srgbClr val="0284C7"/>
-                </a:solidFill>
-              </a:defRPr>
-            </a:pPr>
-            <a:r>
-              <a:t>Periféricos e Ergonomia de Bancada</a:t>
-            </a:r>
-          </a:p>
-          <a:p>
-            <a:pPr>
-              <a:spcBef>
-                <a:spcPts val="600"/>
-              </a:spcBef>
-              <a:defRPr sz="1150">
-                <a:solidFill>
-                  <a:srgbClr val="1E293B"/>
-                </a:solidFill>
-              </a:defRPr>
-            </a:pPr>
-            <a:r>
-              <a:t>•  Monitores Duplos (Dual Screen): Produtividade multiplicada para comparar manuais e ordens de serviço lado a lado.</a:t>
-            </a:r>
-          </a:p>
-          <a:p>
-            <a:pPr>
-              <a:spcBef>
-                <a:spcPts val="600"/>
-              </a:spcBef>
-              <a:defRPr sz="1150">
-                <a:solidFill>
-                  <a:srgbClr val="1E293B"/>
-                </a:solidFill>
-              </a:defRPr>
-            </a:pPr>
-            <a:r>
-              <a:t>•  Teclados com numérico dedicado para digitação ágil de Part Numbers e métricas.</a:t>
-            </a:r>
-          </a:p>
-          <a:p>
-            <a:pPr>
-              <a:spcBef>
-                <a:spcPts val="600"/>
-              </a:spcBef>
-              <a:defRPr sz="1150">
-                <a:solidFill>
-                  <a:srgbClr val="1E293B"/>
-                </a:solidFill>
-              </a:defRPr>
-            </a:pPr>
-            <a:r>
-              <a:t>•  Portas de comunicação rápida (USB 3.2, Thunderbolt, Ethernet Gigabit) para conexão com equipamentos de teste.</a:t>
-            </a:r>
-          </a:p>
-        </p:txBody>
-      </p:sp>
-      <p:sp>
-        <p:nvSpPr>
-          <p:cNvPr id="5" name="TextBox 4"/>
+              <a:defRPr sz="900" b="1">
+                <a:solidFill>
+                  <a:srgbClr val="0072CE"/>
+                </a:solidFill>
+                <a:latin typeface="Arial"/>
+              </a:defRPr>
+            </a:pPr>
+            <a:r>
+              <a:t>INF-117 — INFORMÁTICA APLICADA A AERONÁUTICA</a:t>
+            </a:r>
+          </a:p>
+          <a:p>
+            <a:pPr>
+              <a:defRPr sz="1800" b="1">
+                <a:solidFill>
+                  <a:srgbClr val="FFFFFF"/>
+                </a:solidFill>
+                <a:latin typeface="Arial"/>
+              </a:defRPr>
+            </a:pPr>
+            <a:r>
+              <a:t>Memória RAM e Armazenamento SSD NVMe vs. HDD</a:t>
+            </a:r>
+          </a:p>
+        </p:txBody>
+      </p:sp>
+      <p:sp>
+        <p:nvSpPr>
+          <p:cNvPr id="3" name="TextBox 2"/>
           <p:cNvSpPr txBox="1"/>
           <p:nvPr/>
         </p:nvSpPr>
         <p:spPr>
           <a:xfrm>
-            <a:off x="731520" y="6309360"/>
-            <a:ext cx="10728655" cy="365760"/>
+            <a:off x="457200" y="4800600"/>
+            <a:ext cx="8229600" cy="274320"/>
           </a:xfrm>
           <a:prstGeom prst="rect">
             <a:avLst/>
@@ -5215,7 +5428,7 @@
           <a:noFill/>
         </p:spPr>
         <p:txBody>
-          <a:bodyPr wrap="none" lIns="0" tIns="0" rIns="0" bIns="0">
+          <a:bodyPr wrap="none">
             <a:spAutoFit/>
           </a:bodyPr>
           <a:lstStyle/>
@@ -5223,16 +5436,156 @@
             <a:pPr>
               <a:defRPr sz="900">
                 <a:solidFill>
-                  <a:srgbClr val="64748B"/>
-                </a:solidFill>
-              </a:defRPr>
-            </a:pPr>
-            <a:r>
-              <a:t>Fatec Sorocaba — CST em Manutenção de Aeronaves  |  Prof. André Souza  |  Slide 5 de 11</a:t>
-            </a:r>
-          </a:p>
-        </p:txBody>
-      </p:sp>
+                  <a:srgbClr val="5A5A5A"/>
+                </a:solidFill>
+                <a:latin typeface="Arial"/>
+              </a:defRPr>
+            </a:pPr>
+            <a:r>
+              <a:t>Fatec Sorocaba — CST em Manutenção de Aeronaves  |  Slide 5 de 12</a:t>
+            </a:r>
+          </a:p>
+        </p:txBody>
+      </p:sp>
+      <p:sp>
+        <p:nvSpPr>
+          <p:cNvPr id="4" name="TextBox 3"/>
+          <p:cNvSpPr txBox="1"/>
+          <p:nvPr/>
+        </p:nvSpPr>
+        <p:spPr>
+          <a:xfrm>
+            <a:off x="548640" y="1005840"/>
+            <a:ext cx="4206240" cy="3657600"/>
+          </a:xfrm>
+          <a:prstGeom prst="rect">
+            <a:avLst/>
+          </a:prstGeom>
+          <a:noFill/>
+        </p:spPr>
+        <p:txBody>
+          <a:bodyPr wrap="square">
+            <a:spAutoFit/>
+          </a:bodyPr>
+          <a:lstStyle/>
+          <a:p>
+            <a:pPr>
+              <a:spcBef>
+                <a:spcPts val="0"/>
+              </a:spcBef>
+            </a:pPr>
+            <a:r>
+              <a:rPr b="1" sz="1200">
+                <a:solidFill>
+                  <a:srgbClr val="0F2043"/>
+                </a:solidFill>
+              </a:rPr>
+              <a:t>Memória RAM (Volátil):</a:t>
+            </a:r>
+            <a:r>
+              <a:rPr sz="1200">
+                <a:solidFill>
+                  <a:srgbClr val="282828"/>
+                </a:solidFill>
+              </a:rPr>
+              <a:t> Armazena temporariamente os programas em uso (Excel, CAD, Manuais). Sem RAM suficiente, o Windows usa o disco (*Paging File*), gerando lentidão crítica.</a:t>
+            </a:r>
+          </a:p>
+          <a:p>
+            <a:pPr>
+              <a:spcBef>
+                <a:spcPts val="800"/>
+              </a:spcBef>
+            </a:pPr>
+            <a:r>
+              <a:rPr b="1" sz="1200">
+                <a:solidFill>
+                  <a:srgbClr val="0F2043"/>
+                </a:solidFill>
+              </a:rPr>
+              <a:t>Capacidade Necessária:</a:t>
+            </a:r>
+            <a:r>
+              <a:rPr sz="1200">
+                <a:solidFill>
+                  <a:srgbClr val="282828"/>
+                </a:solidFill>
+              </a:rPr>
+              <a:t> 16 GB (Hangar/MRO) a 32 GB / 64 GB DDR5 (Engenharia/PCM).</a:t>
+            </a:r>
+          </a:p>
+          <a:p>
+            <a:pPr>
+              <a:spcBef>
+                <a:spcPts val="800"/>
+              </a:spcBef>
+            </a:pPr>
+            <a:r>
+              <a:rPr b="1" sz="1200">
+                <a:solidFill>
+                  <a:srgbClr val="0F2043"/>
+                </a:solidFill>
+              </a:rPr>
+              <a:t>SSD NVMe PCIe 4.0 (Persistente):</a:t>
+            </a:r>
+            <a:r>
+              <a:rPr sz="1200">
+                <a:solidFill>
+                  <a:srgbClr val="282828"/>
+                </a:solidFill>
+              </a:rPr>
+              <a:t> Taxas de leitura de 5.000 a 7.000 MB/s. Chips Flash 100% imunes a vibrações de ferramentas pneumáticas em hangares.</a:t>
+            </a:r>
+          </a:p>
+          <a:p>
+            <a:pPr>
+              <a:spcBef>
+                <a:spcPts val="800"/>
+              </a:spcBef>
+            </a:pPr>
+            <a:r>
+              <a:rPr b="1" sz="1200">
+                <a:solidFill>
+                  <a:srgbClr val="0F2043"/>
+                </a:solidFill>
+              </a:rPr>
+              <a:t>HDD Mecânico (Obsoleto em MRO):</a:t>
+            </a:r>
+            <a:r>
+              <a:rPr sz="1200">
+                <a:solidFill>
+                  <a:srgbClr val="282828"/>
+                </a:solidFill>
+              </a:rPr>
+              <a:t> Apenas ~150 MB/s. Possui agulhas e pratos magnéticos móveis extremamente vulneráveis a impactos e quedas.</a:t>
+            </a:r>
+          </a:p>
+        </p:txBody>
+      </p:sp>
+      <p:pic>
+        <p:nvPicPr>
+          <p:cNvPr id="5" name="Picture 4" descr="storage.jpg"/>
+          <p:cNvPicPr>
+            <a:picLocks noChangeAspect="1"/>
+          </p:cNvPicPr>
+          <p:nvPr/>
+        </p:nvPicPr>
+        <p:blipFill>
+          <a:blip r:embed="rId2"/>
+          <a:stretch>
+            <a:fillRect/>
+          </a:stretch>
+        </p:blipFill>
+        <p:spPr>
+          <a:xfrm>
+            <a:off x="4937760" y="1097280"/>
+            <a:ext cx="3657600" cy="3474720"/>
+          </a:xfrm>
+          <a:prstGeom prst="rect">
+            <a:avLst/>
+          </a:prstGeom>
+        </p:spPr>
+      </p:pic>
     </p:spTree>
   </p:cSld>
   <p:clrMapOvr>
@@ -5253,75 +5606,23 @@
       <p:grpSpPr/>
       <p:sp>
         <p:nvSpPr>
-          <p:cNvPr id="2" name="TextBox 1"/>
-          <p:cNvSpPr txBox="1"/>
+          <p:cNvPr id="2" name="Rectangle 1"/>
+          <p:cNvSpPr/>
           <p:nvPr/>
         </p:nvSpPr>
         <p:spPr>
           <a:xfrm>
-            <a:off x="731520" y="365760"/>
-            <a:ext cx="10728655" cy="1005840"/>
+            <a:off x="0" y="0"/>
+            <a:ext cx="9144000" cy="822960"/>
           </a:xfrm>
           <a:prstGeom prst="rect">
             <a:avLst/>
           </a:prstGeom>
-          <a:noFill/>
-        </p:spPr>
-        <p:txBody>
-          <a:bodyPr wrap="square" lIns="0" tIns="0" rIns="0" bIns="0">
-            <a:spAutoFit/>
-          </a:bodyPr>
-          <a:lstStyle/>
-          <a:p>
-            <a:pPr>
-              <a:defRPr sz="1100" b="1">
-                <a:solidFill>
-                  <a:srgbClr val="0284C7"/>
-                </a:solidFill>
-              </a:defRPr>
-            </a:pPr>
-            <a:r>
-              <a:t>INF-117 | INFORMÁTICA APLICADA A AERONÁUTICA</a:t>
-            </a:r>
-          </a:p>
-          <a:p>
-            <a:pPr>
-              <a:spcBef>
-                <a:spcPts val="300"/>
-              </a:spcBef>
-              <a:defRPr sz="2200" b="1">
-                <a:solidFill>
-                  <a:srgbClr val="0F2537"/>
-                </a:solidFill>
-              </a:defRPr>
-            </a:pPr>
-            <a:r>
-              <a:t>Detalhamento Técnico: Estação para Hangar e Oficina MRO</a:t>
-            </a:r>
-          </a:p>
-        </p:txBody>
-      </p:sp>
-      <p:sp>
-        <p:nvSpPr>
-          <p:cNvPr id="3" name="Rounded Rectangle 2"/>
-          <p:cNvSpPr/>
-          <p:nvPr/>
-        </p:nvSpPr>
-        <p:spPr>
-          <a:xfrm>
-            <a:off x="731520" y="1554480"/>
-            <a:ext cx="5166360" cy="4480560"/>
-          </a:xfrm>
-          <a:prstGeom prst="roundRect">
-            <a:avLst/>
-          </a:prstGeom>
           <a:solidFill>
-            <a:srgbClr val="FFFFFF"/>
+            <a:srgbClr val="0F2043"/>
           </a:solidFill>
-          <a:ln w="12700">
-            <a:solidFill>
-              <a:srgbClr val="CBD5E1"/>
-            </a:solidFill>
+          <a:ln>
+            <a:noFill/>
           </a:ln>
         </p:spPr>
         <p:style>
@@ -5339,93 +5640,68 @@
           </a:fontRef>
         </p:style>
         <p:txBody>
-          <a:bodyPr rtlCol="0" anchor="ctr" wrap="square" lIns="274320" rIns="274320" tIns="274320"/>
+          <a:bodyPr rtlCol="0" anchor="ctr" wrap="square" lIns="457200" tIns="109728"/>
           <a:lstStyle/>
           <a:p>
             <a:pPr algn="ctr">
-              <a:defRPr sz="1600" b="1">
-                <a:solidFill>
-                  <a:srgbClr val="0F2537"/>
-                </a:solidFill>
-              </a:defRPr>
-            </a:pPr>
-            <a:r>
-              <a:t>Configuração Especificada</a:t>
-            </a:r>
-          </a:p>
-          <a:p>
-            <a:pPr>
-              <a:spcBef>
-                <a:spcPts val="600"/>
-              </a:spcBef>
-              <a:defRPr sz="1150">
-                <a:solidFill>
-                  <a:srgbClr val="1E293B"/>
-                </a:solidFill>
-              </a:defRPr>
-            </a:pPr>
-            <a:r>
-              <a:t>•  CPU: Intel Core i5 / AMD Ryzen 5 (6 Núcleos / 12 Threads).</a:t>
-            </a:r>
-          </a:p>
-          <a:p>
-            <a:pPr>
-              <a:spcBef>
-                <a:spcPts val="600"/>
-              </a:spcBef>
-              <a:defRPr sz="1150">
-                <a:solidFill>
-                  <a:srgbClr val="1E293B"/>
-                </a:solidFill>
-              </a:defRPr>
-            </a:pPr>
-            <a:r>
-              <a:t>•  Memória RAM: 16 GB DDR4 3200 MHz.</a:t>
-            </a:r>
-          </a:p>
-          <a:p>
-            <a:pPr>
-              <a:spcBef>
-                <a:spcPts val="600"/>
-              </a:spcBef>
-              <a:defRPr sz="1150">
-                <a:solidFill>
-                  <a:srgbClr val="1E293B"/>
-                </a:solidFill>
-              </a:defRPr>
-            </a:pPr>
-            <a:r>
-              <a:t>•  Armazenamento: SSD NVMe M.2 512 GB PCIe 3.0 / 4.0.</a:t>
-            </a:r>
-          </a:p>
-          <a:p>
-            <a:pPr>
-              <a:spcBef>
-                <a:spcPts val="600"/>
-              </a:spcBef>
-              <a:defRPr sz="1150">
-                <a:solidFill>
-                  <a:srgbClr val="1E293B"/>
-                </a:solidFill>
-              </a:defRPr>
-            </a:pPr>
-            <a:r>
-              <a:t>•  GPU: Vídeo Integrado (Intel Iris Xe / AMD Radeon Vega).</a:t>
-            </a:r>
-          </a:p>
-          <a:p>
-            <a:pPr>
-              <a:spcBef>
-                <a:spcPts val="600"/>
-              </a:spcBef>
-              <a:defRPr sz="1150">
-                <a:solidFill>
-                  <a:srgbClr val="1E293B"/>
-                </a:solidFill>
-              </a:defRPr>
-            </a:pPr>
-            <a:r>
-              <a:t>•  Monitor: 24" Full HD com Tratamento Antirreflexo.</a:t>
+              <a:defRPr sz="900" b="1">
+                <a:solidFill>
+                  <a:srgbClr val="0072CE"/>
+                </a:solidFill>
+                <a:latin typeface="Arial"/>
+              </a:defRPr>
+            </a:pPr>
+            <a:r>
+              <a:t>INF-117 — INFORMÁTICA APLICADA A AERONÁUTICA</a:t>
+            </a:r>
+          </a:p>
+          <a:p>
+            <a:pPr>
+              <a:defRPr sz="1800" b="1">
+                <a:solidFill>
+                  <a:srgbClr val="FFFFFF"/>
+                </a:solidFill>
+                <a:latin typeface="Arial"/>
+              </a:defRPr>
+            </a:pPr>
+            <a:r>
+              <a:t>Processamento Gráfico (GPU) e Periféricos Ergonomicos</a:t>
+            </a:r>
+          </a:p>
+        </p:txBody>
+      </p:sp>
+      <p:sp>
+        <p:nvSpPr>
+          <p:cNvPr id="3" name="TextBox 2"/>
+          <p:cNvSpPr txBox="1"/>
+          <p:nvPr/>
+        </p:nvSpPr>
+        <p:spPr>
+          <a:xfrm>
+            <a:off x="457200" y="4800600"/>
+            <a:ext cx="8229600" cy="274320"/>
+          </a:xfrm>
+          <a:prstGeom prst="rect">
+            <a:avLst/>
+          </a:prstGeom>
+          <a:noFill/>
+        </p:spPr>
+        <p:txBody>
+          <a:bodyPr wrap="none">
+            <a:spAutoFit/>
+          </a:bodyPr>
+          <a:lstStyle/>
+          <a:p>
+            <a:pPr>
+              <a:defRPr sz="900">
+                <a:solidFill>
+                  <a:srgbClr val="5A5A5A"/>
+                </a:solidFill>
+                <a:latin typeface="Arial"/>
+              </a:defRPr>
+            </a:pPr>
+            <a:r>
+              <a:t>Fatec Sorocaba — CST em Manutenção de Aeronaves  |  Slide 6 de 12</a:t>
             </a:r>
           </a:p>
         </p:txBody>
@@ -5438,8 +5714,8 @@
         </p:nvSpPr>
         <p:spPr>
           <a:xfrm>
-            <a:off x="6263640" y="1554480"/>
-            <a:ext cx="5166360" cy="4480560"/>
+            <a:off x="548640" y="1097280"/>
+            <a:ext cx="3840480" cy="3474720"/>
           </a:xfrm>
           <a:prstGeom prst="roundRect">
             <a:avLst/>
@@ -5447,9 +5723,9 @@
           <a:solidFill>
             <a:srgbClr val="FFFFFF"/>
           </a:solidFill>
-          <a:ln w="12700">
+          <a:ln>
             <a:solidFill>
-              <a:srgbClr val="CBD5E1"/>
+              <a:srgbClr val="D2DCE6"/>
             </a:solidFill>
           </a:ln>
         </p:spPr>
@@ -5468,94 +5744,10 @@
           </a:fontRef>
         </p:style>
         <p:txBody>
-          <a:bodyPr rtlCol="0" anchor="ctr" wrap="square" lIns="274320" rIns="274320" tIns="274320"/>
-          <a:lstStyle/>
-          <a:p>
-            <a:pPr algn="ctr">
-              <a:defRPr sz="1600" b="1">
-                <a:solidFill>
-                  <a:srgbClr val="0284C7"/>
-                </a:solidFill>
-              </a:defRPr>
-            </a:pPr>
-            <a:r>
-              <a:t>Por que essa Configuração? (Justificativa Técnica)</a:t>
-            </a:r>
-          </a:p>
-          <a:p>
-            <a:pPr>
-              <a:spcBef>
-                <a:spcPts val="600"/>
-              </a:spcBef>
-              <a:defRPr sz="1150">
-                <a:solidFill>
-                  <a:srgbClr val="1E293B"/>
-                </a:solidFill>
-              </a:defRPr>
-            </a:pPr>
-            <a:r>
-              <a:t>•  CPU (6 Cores): Renderiza PDFs vetoriais pesados e roda o sistema MRO sem gargalos térmicos.</a:t>
-            </a:r>
-          </a:p>
-          <a:p>
-            <a:pPr>
-              <a:spcBef>
-                <a:spcPts val="600"/>
-              </a:spcBef>
-              <a:defRPr sz="1150">
-                <a:solidFill>
-                  <a:srgbClr val="1E293B"/>
-                </a:solidFill>
-              </a:defRPr>
-            </a:pPr>
-            <a:r>
-              <a:t>•  RAM 16 GB: Manuais AMM ocupam 2-4 GB de RAM em cache. 16 GB evita travamento ao alternar abas.</a:t>
-            </a:r>
-          </a:p>
-          <a:p>
-            <a:pPr>
-              <a:spcBef>
-                <a:spcPts val="600"/>
-              </a:spcBef>
-              <a:defRPr sz="1150">
-                <a:solidFill>
-                  <a:srgbClr val="1E293B"/>
-                </a:solidFill>
-              </a:defRPr>
-            </a:pPr>
-            <a:r>
-              <a:t>•  SSD 512 GB: Não tem partes móveis (imune a vibrações de ferramentas e poeira do hangar).</a:t>
-            </a:r>
-          </a:p>
-          <a:p>
-            <a:pPr>
-              <a:spcBef>
-                <a:spcPts val="600"/>
-              </a:spcBef>
-              <a:defRPr sz="1150">
-                <a:solidFill>
-                  <a:srgbClr val="1E293B"/>
-                </a:solidFill>
-              </a:defRPr>
-            </a:pPr>
-            <a:r>
-              <a:t>•  GPU Integrada: Desenhos 2D e esquemáticos elétricos não exigem placa cara, economizando energia.</a:t>
-            </a:r>
-          </a:p>
-          <a:p>
-            <a:pPr>
-              <a:spcBef>
-                <a:spcPts val="600"/>
-              </a:spcBef>
-              <a:defRPr sz="1150">
-                <a:solidFill>
-                  <a:srgbClr val="1E293B"/>
-                </a:solidFill>
-              </a:defRPr>
-            </a:pPr>
-            <a:r>
-              <a:t>•  Tela Antirreflexo: Fundamental sob iluminação industrial forte do hangar, evitando reflexos e fadiga visual.</a:t>
-            </a:r>
+          <a:bodyPr rtlCol="0" anchor="ctr"/>
+          <a:lstStyle/>
+          <a:p>
+            <a:pPr algn="ctr"/>
           </a:p>
         </p:txBody>
       </p:sp>
@@ -5567,8 +5759,8 @@
         </p:nvSpPr>
         <p:spPr>
           <a:xfrm>
-            <a:off x="731520" y="6309360"/>
-            <a:ext cx="10728655" cy="365760"/>
+            <a:off x="640080" y="1188720"/>
+            <a:ext cx="3657600" cy="3291840"/>
           </a:xfrm>
           <a:prstGeom prst="rect">
             <a:avLst/>
@@ -5576,20 +5768,261 @@
           <a:noFill/>
         </p:spPr>
         <p:txBody>
-          <a:bodyPr wrap="none" lIns="0" tIns="0" rIns="0" bIns="0">
+          <a:bodyPr wrap="square">
             <a:spAutoFit/>
           </a:bodyPr>
           <a:lstStyle/>
           <a:p>
             <a:pPr>
-              <a:defRPr sz="900">
-                <a:solidFill>
-                  <a:srgbClr val="64748B"/>
-                </a:solidFill>
-              </a:defRPr>
-            </a:pPr>
-            <a:r>
-              <a:t>Fatec Sorocaba — CST em Manutenção de Aeronaves  |  Prof. André Souza  |  Slide 6 de 11</a:t>
+              <a:defRPr b="1" sz="1300">
+                <a:solidFill>
+                  <a:srgbClr val="0F2043"/>
+                </a:solidFill>
+              </a:defRPr>
+            </a:pPr>
+            <a:r>
+              <a:t>PLACA DE VÍDEO (GPU)</a:t>
+            </a:r>
+          </a:p>
+          <a:p>
+            <a:pPr>
+              <a:spcBef>
+                <a:spcPts val="800"/>
+              </a:spcBef>
+            </a:pPr>
+            <a:r>
+              <a:rPr b="1" sz="1100">
+                <a:solidFill>
+                  <a:srgbClr val="0F2043"/>
+                </a:solidFill>
+              </a:rPr>
+              <a:t>• VRAM Dedicada (GDDR6):</a:t>
+            </a:r>
+            <a:r>
+              <a:rPr sz="1100">
+                <a:solidFill>
+                  <a:srgbClr val="282828"/>
+                </a:solidFill>
+              </a:rPr>
+              <a:t>  Permite rotação fluida de modelos CAD 3D de turbinas e fuselagens.</a:t>
+            </a:r>
+          </a:p>
+          <a:p>
+            <a:pPr>
+              <a:spcBef>
+                <a:spcPts val="800"/>
+              </a:spcBef>
+            </a:pPr>
+            <a:r>
+              <a:rPr b="1" sz="1100">
+                <a:solidFill>
+                  <a:srgbClr val="0F2043"/>
+                </a:solidFill>
+              </a:rPr>
+              <a:t>• GPU Integrada vs. Dedicada:</a:t>
+            </a:r>
+            <a:r>
+              <a:rPr sz="1100">
+                <a:solidFill>
+                  <a:srgbClr val="282828"/>
+                </a:solidFill>
+              </a:rPr>
+              <a:t>  Vídeo integrado (Intel Iris Xe) atende diagramas 2D; GPU dedicada (NVIDIA RTX) é necessária para engenharia 3D.</a:t>
+            </a:r>
+          </a:p>
+          <a:p>
+            <a:pPr>
+              <a:spcBef>
+                <a:spcPts val="800"/>
+              </a:spcBef>
+            </a:pPr>
+            <a:r>
+              <a:rPr b="1" sz="1100">
+                <a:solidFill>
+                  <a:srgbClr val="0F2043"/>
+                </a:solidFill>
+              </a:rPr>
+              <a:t>• Liberação do Processador:</a:t>
+            </a:r>
+            <a:r>
+              <a:rPr sz="1100">
+                <a:solidFill>
+                  <a:srgbClr val="282828"/>
+                </a:solidFill>
+              </a:rPr>
+              <a:t>  A GPU realiza os cálculos geométricos de renderização, liberando a CPU para a lógica de programas.</a:t>
+            </a:r>
+          </a:p>
+        </p:txBody>
+      </p:sp>
+      <p:sp>
+        <p:nvSpPr>
+          <p:cNvPr id="6" name="Rounded Rectangle 5"/>
+          <p:cNvSpPr/>
+          <p:nvPr/>
+        </p:nvSpPr>
+        <p:spPr>
+          <a:xfrm>
+            <a:off x="4754880" y="1097280"/>
+            <a:ext cx="3840480" cy="3474720"/>
+          </a:xfrm>
+          <a:prstGeom prst="roundRect">
+            <a:avLst/>
+          </a:prstGeom>
+          <a:solidFill>
+            <a:srgbClr val="FFFFFF"/>
+          </a:solidFill>
+          <a:ln>
+            <a:solidFill>
+              <a:srgbClr val="D2DCE6"/>
+            </a:solidFill>
+          </a:ln>
+        </p:spPr>
+        <p:style>
+          <a:lnRef idx="1">
+            <a:schemeClr val="accent1"/>
+          </a:lnRef>
+          <a:fillRef idx="3">
+            <a:schemeClr val="accent1"/>
+          </a:fillRef>
+          <a:effectRef idx="2">
+            <a:schemeClr val="accent1"/>
+          </a:effectRef>
+          <a:fontRef idx="minor">
+            <a:schemeClr val="lt1"/>
+          </a:fontRef>
+        </p:style>
+        <p:txBody>
+          <a:bodyPr rtlCol="0" anchor="ctr"/>
+          <a:lstStyle/>
+          <a:p>
+            <a:pPr algn="ctr"/>
+          </a:p>
+        </p:txBody>
+      </p:sp>
+      <p:sp>
+        <p:nvSpPr>
+          <p:cNvPr id="7" name="TextBox 6"/>
+          <p:cNvSpPr txBox="1"/>
+          <p:nvPr/>
+        </p:nvSpPr>
+        <p:spPr>
+          <a:xfrm>
+            <a:off x="4846320" y="1188720"/>
+            <a:ext cx="3657600" cy="3291840"/>
+          </a:xfrm>
+          <a:prstGeom prst="rect">
+            <a:avLst/>
+          </a:prstGeom>
+          <a:noFill/>
+        </p:spPr>
+        <p:txBody>
+          <a:bodyPr wrap="square">
+            <a:spAutoFit/>
+          </a:bodyPr>
+          <a:lstStyle/>
+          <a:p>
+            <a:pPr>
+              <a:defRPr b="1" sz="1300">
+                <a:solidFill>
+                  <a:srgbClr val="0F2043"/>
+                </a:solidFill>
+              </a:defRPr>
+            </a:pPr>
+            <a:r>
+              <a:t>PERIFÉRICOS &amp; ERGONOMIA</a:t>
+            </a:r>
+          </a:p>
+          <a:p>
+            <a:pPr>
+              <a:spcBef>
+                <a:spcPts val="800"/>
+              </a:spcBef>
+            </a:pPr>
+            <a:r>
+              <a:rPr b="1" sz="1100">
+                <a:solidFill>
+                  <a:srgbClr val="0F2043"/>
+                </a:solidFill>
+              </a:rPr>
+              <a:t>• Monitores Duplos (QHD):</a:t>
+            </a:r>
+            <a:r>
+              <a:rPr sz="1100">
+                <a:solidFill>
+                  <a:srgbClr val="282828"/>
+                </a:solidFill>
+              </a:rPr>
+              <a:t>  Permitem comparar o manual estrutural (SRM) em uma tela enquanto elabora a Ordem de Serviço na outra.</a:t>
+            </a:r>
+          </a:p>
+          <a:p>
+            <a:pPr>
+              <a:spcBef>
+                <a:spcPts val="800"/>
+              </a:spcBef>
+            </a:pPr>
+            <a:r>
+              <a:rPr b="1" sz="1100">
+                <a:solidFill>
+                  <a:srgbClr val="0F2043"/>
+                </a:solidFill>
+              </a:rPr>
+              <a:t>• Tratamento Antirreflexo (*Matte*):</a:t>
+            </a:r>
+            <a:r>
+              <a:rPr sz="1100">
+                <a:solidFill>
+                  <a:srgbClr val="282828"/>
+                </a:solidFill>
+              </a:rPr>
+              <a:t>  Essencial contra a forte iluminação industrial dos galpões de hangar.</a:t>
+            </a:r>
+          </a:p>
+          <a:p>
+            <a:pPr>
+              <a:spcBef>
+                <a:spcPts val="800"/>
+              </a:spcBef>
+            </a:pPr>
+            <a:r>
+              <a:rPr b="1" sz="1100">
+                <a:solidFill>
+                  <a:srgbClr val="0F2043"/>
+                </a:solidFill>
+              </a:rPr>
+              <a:t>• Teclado Numérico Dedicado:</a:t>
+            </a:r>
+            <a:r>
+              <a:rPr sz="1100">
+                <a:solidFill>
+                  <a:srgbClr val="282828"/>
+                </a:solidFill>
+              </a:rPr>
+              <a:t>  Acelera a digitação constante de códigos e Part Numbers de peças aeronáuticas.</a:t>
+            </a:r>
+          </a:p>
+          <a:p>
+            <a:pPr>
+              <a:spcBef>
+                <a:spcPts val="800"/>
+              </a:spcBef>
+            </a:pPr>
+            <a:r>
+              <a:rPr b="1" sz="1100">
+                <a:solidFill>
+                  <a:srgbClr val="0F2043"/>
+                </a:solidFill>
+              </a:rPr>
+              <a:t>• Conectividade I/O:</a:t>
+            </a:r>
+            <a:r>
+              <a:rPr sz="1100">
+                <a:solidFill>
+                  <a:srgbClr val="282828"/>
+                </a:solidFill>
+              </a:rPr>
+              <a:t>  Portas USB 3.2 e Ethernet Gigabit para sincronização com instrumentos de bancada.</a:t>
             </a:r>
           </a:p>
         </p:txBody>
@@ -5614,75 +6047,23 @@
       <p:grpSpPr/>
       <p:sp>
         <p:nvSpPr>
-          <p:cNvPr id="2" name="TextBox 1"/>
-          <p:cNvSpPr txBox="1"/>
+          <p:cNvPr id="2" name="Rectangle 1"/>
+          <p:cNvSpPr/>
           <p:nvPr/>
         </p:nvSpPr>
         <p:spPr>
           <a:xfrm>
-            <a:off x="731520" y="365760"/>
-            <a:ext cx="10728655" cy="1005840"/>
+            <a:off x="0" y="0"/>
+            <a:ext cx="9144000" cy="822960"/>
           </a:xfrm>
           <a:prstGeom prst="rect">
             <a:avLst/>
           </a:prstGeom>
-          <a:noFill/>
-        </p:spPr>
-        <p:txBody>
-          <a:bodyPr wrap="square" lIns="0" tIns="0" rIns="0" bIns="0">
-            <a:spAutoFit/>
-          </a:bodyPr>
-          <a:lstStyle/>
-          <a:p>
-            <a:pPr>
-              <a:defRPr sz="1100" b="1">
-                <a:solidFill>
-                  <a:srgbClr val="0284C7"/>
-                </a:solidFill>
-              </a:defRPr>
-            </a:pPr>
-            <a:r>
-              <a:t>INF-117 | INFORMÁTICA APLICADA A AERONÁUTICA</a:t>
-            </a:r>
-          </a:p>
-          <a:p>
-            <a:pPr>
-              <a:spcBef>
-                <a:spcPts val="300"/>
-              </a:spcBef>
-              <a:defRPr sz="2200" b="1">
-                <a:solidFill>
-                  <a:srgbClr val="0F2537"/>
-                </a:solidFill>
-              </a:defRPr>
-            </a:pPr>
-            <a:r>
-              <a:t>Detalhamento Técnico: Workstation de Engenharia e PCM</a:t>
-            </a:r>
-          </a:p>
-        </p:txBody>
-      </p:sp>
-      <p:sp>
-        <p:nvSpPr>
-          <p:cNvPr id="3" name="Rounded Rectangle 2"/>
-          <p:cNvSpPr/>
-          <p:nvPr/>
-        </p:nvSpPr>
-        <p:spPr>
-          <a:xfrm>
-            <a:off x="731520" y="1554480"/>
-            <a:ext cx="5166360" cy="4480560"/>
-          </a:xfrm>
-          <a:prstGeom prst="roundRect">
-            <a:avLst/>
-          </a:prstGeom>
           <a:solidFill>
-            <a:srgbClr val="FFFFFF"/>
+            <a:srgbClr val="0F2043"/>
           </a:solidFill>
-          <a:ln w="12700">
-            <a:solidFill>
-              <a:srgbClr val="CBD5E1"/>
-            </a:solidFill>
+          <a:ln>
+            <a:noFill/>
           </a:ln>
         </p:spPr>
         <p:style>
@@ -5700,236 +6081,46 @@
           </a:fontRef>
         </p:style>
         <p:txBody>
-          <a:bodyPr rtlCol="0" anchor="ctr" wrap="square" lIns="274320" rIns="274320" tIns="274320"/>
+          <a:bodyPr rtlCol="0" anchor="ctr" wrap="square" lIns="457200" tIns="109728"/>
           <a:lstStyle/>
           <a:p>
             <a:pPr algn="ctr">
-              <a:defRPr sz="1600" b="1">
-                <a:solidFill>
-                  <a:srgbClr val="0F2537"/>
-                </a:solidFill>
-              </a:defRPr>
-            </a:pPr>
-            <a:r>
-              <a:t>Configuração Especificada</a:t>
-            </a:r>
-          </a:p>
-          <a:p>
-            <a:pPr>
-              <a:spcBef>
-                <a:spcPts val="600"/>
-              </a:spcBef>
-              <a:defRPr sz="1150">
-                <a:solidFill>
-                  <a:srgbClr val="1E293B"/>
-                </a:solidFill>
-              </a:defRPr>
-            </a:pPr>
-            <a:r>
-              <a:t>•  CPU: Intel Core i7 / Ryzen 7 (8 a 16 Núcleos, Clock Boost &gt;= 4.7 GHz).</a:t>
-            </a:r>
-          </a:p>
-          <a:p>
-            <a:pPr>
-              <a:spcBef>
-                <a:spcPts val="600"/>
-              </a:spcBef>
-              <a:defRPr sz="1150">
-                <a:solidFill>
-                  <a:srgbClr val="1E293B"/>
-                </a:solidFill>
-              </a:defRPr>
-            </a:pPr>
-            <a:r>
-              <a:t>•  Memória RAM: 32 GB a 64 GB DDR5 5600 MHz (Dual Channel).</a:t>
-            </a:r>
-          </a:p>
-          <a:p>
-            <a:pPr>
-              <a:spcBef>
-                <a:spcPts val="600"/>
-              </a:spcBef>
-              <a:defRPr sz="1150">
-                <a:solidFill>
-                  <a:srgbClr val="1E293B"/>
-                </a:solidFill>
-              </a:defRPr>
-            </a:pPr>
-            <a:r>
-              <a:t>•  Armazenamento: SSD NVMe 1 TB a 2 TB PCIe 4.0 (Leitura &gt;= 7.000 MB/s).</a:t>
-            </a:r>
-          </a:p>
-          <a:p>
-            <a:pPr>
-              <a:spcBef>
-                <a:spcPts val="600"/>
-              </a:spcBef>
-              <a:defRPr sz="1150">
-                <a:solidFill>
-                  <a:srgbClr val="1E293B"/>
-                </a:solidFill>
-              </a:defRPr>
-            </a:pPr>
-            <a:r>
-              <a:t>•  GPU: Placa Dedicada NVIDIA RTX Profissional (8-12 GB VRAM).</a:t>
-            </a:r>
-          </a:p>
-          <a:p>
-            <a:pPr>
-              <a:spcBef>
-                <a:spcPts val="600"/>
-              </a:spcBef>
-              <a:defRPr sz="1150">
-                <a:solidFill>
-                  <a:srgbClr val="1E293B"/>
-                </a:solidFill>
-              </a:defRPr>
-            </a:pPr>
-            <a:r>
-              <a:t>•  Monitores: 2 Monitores de 27" IPS QHD (2560x1440) com Braço Articulado.</a:t>
-            </a:r>
-          </a:p>
-        </p:txBody>
-      </p:sp>
-      <p:sp>
-        <p:nvSpPr>
-          <p:cNvPr id="4" name="Rounded Rectangle 3"/>
-          <p:cNvSpPr/>
-          <p:nvPr/>
-        </p:nvSpPr>
-        <p:spPr>
-          <a:xfrm>
-            <a:off x="6263640" y="1554480"/>
-            <a:ext cx="5166360" cy="4480560"/>
-          </a:xfrm>
-          <a:prstGeom prst="roundRect">
-            <a:avLst/>
-          </a:prstGeom>
-          <a:solidFill>
-            <a:srgbClr val="FFFFFF"/>
-          </a:solidFill>
-          <a:ln w="12700">
-            <a:solidFill>
-              <a:srgbClr val="CBD5E1"/>
-            </a:solidFill>
-          </a:ln>
-        </p:spPr>
-        <p:style>
-          <a:lnRef idx="1">
-            <a:schemeClr val="accent1"/>
-          </a:lnRef>
-          <a:fillRef idx="3">
-            <a:schemeClr val="accent1"/>
-          </a:fillRef>
-          <a:effectRef idx="2">
-            <a:schemeClr val="accent1"/>
-          </a:effectRef>
-          <a:fontRef idx="minor">
-            <a:schemeClr val="lt1"/>
-          </a:fontRef>
-        </p:style>
-        <p:txBody>
-          <a:bodyPr rtlCol="0" anchor="ctr" wrap="square" lIns="274320" rIns="274320" tIns="274320"/>
-          <a:lstStyle/>
-          <a:p>
-            <a:pPr algn="ctr">
-              <a:defRPr sz="1600" b="1">
-                <a:solidFill>
-                  <a:srgbClr val="0284C7"/>
-                </a:solidFill>
-              </a:defRPr>
-            </a:pPr>
-            <a:r>
-              <a:t>Por que essa Configuração? (Justificativa Técnica)</a:t>
-            </a:r>
-          </a:p>
-          <a:p>
-            <a:pPr>
-              <a:spcBef>
-                <a:spcPts val="600"/>
-              </a:spcBef>
-              <a:defRPr sz="1150">
-                <a:solidFill>
-                  <a:srgbClr val="1E293B"/>
-                </a:solidFill>
-              </a:defRPr>
-            </a:pPr>
-            <a:r>
-              <a:t>•  CPU (High Clock + Multithread): Alto clock single-core acelera modelagem CAD; múltiplos cores aceleram cálculos matriciais do Excel.</a:t>
-            </a:r>
-          </a:p>
-          <a:p>
-            <a:pPr>
-              <a:spcBef>
-                <a:spcPts val="600"/>
-              </a:spcBef>
-              <a:defRPr sz="1150">
-                <a:solidFill>
-                  <a:srgbClr val="1E293B"/>
-                </a:solidFill>
-              </a:defRPr>
-            </a:pPr>
-            <a:r>
-              <a:t>•  RAM 32-64 GB DDR5: Bases de confiabilidade com 500k+ linhas e montagens 3D consomem mais de 20 GB de memória real.</a:t>
-            </a:r>
-          </a:p>
-          <a:p>
-            <a:pPr>
-              <a:spcBef>
-                <a:spcPts val="600"/>
-              </a:spcBef>
-              <a:defRPr sz="1150">
-                <a:solidFill>
-                  <a:srgbClr val="1E293B"/>
-                </a:solidFill>
-              </a:defRPr>
-            </a:pPr>
-            <a:r>
-              <a:t>•  SSD PCIe 4.0 (7.000 MB/s): Abre montagens CAD complexas com milhares de peças em segundos.</a:t>
-            </a:r>
-          </a:p>
-          <a:p>
-            <a:pPr>
-              <a:spcBef>
-                <a:spcPts val="600"/>
-              </a:spcBef>
-              <a:defRPr sz="1150">
-                <a:solidFill>
-                  <a:srgbClr val="1E293B"/>
-                </a:solidFill>
-              </a:defRPr>
-            </a:pPr>
-            <a:r>
-              <a:t>•  GPU RTX Dedicada: Renderiza rotação de motores e trens de pouso em tempo real com aceleração por hardware.</a:t>
-            </a:r>
-          </a:p>
-          <a:p>
-            <a:pPr>
-              <a:spcBef>
-                <a:spcPts val="600"/>
-              </a:spcBef>
-              <a:defRPr sz="1150">
-                <a:solidFill>
-                  <a:srgbClr val="1E293B"/>
-                </a:solidFill>
-              </a:defRPr>
-            </a:pPr>
-            <a:r>
-              <a:t>•  2x Telas 27" QHD: 77% mais área visual que 1080p, permitindo exibir o manual SRM em uma tela e a planilha/CAD na outra.</a:t>
-            </a:r>
-          </a:p>
-        </p:txBody>
-      </p:sp>
-      <p:sp>
-        <p:nvSpPr>
-          <p:cNvPr id="5" name="TextBox 4"/>
+              <a:defRPr sz="900" b="1">
+                <a:solidFill>
+                  <a:srgbClr val="0072CE"/>
+                </a:solidFill>
+                <a:latin typeface="Arial"/>
+              </a:defRPr>
+            </a:pPr>
+            <a:r>
+              <a:t>INF-117 — INFORMÁTICA APLICADA A AERONÁUTICA</a:t>
+            </a:r>
+          </a:p>
+          <a:p>
+            <a:pPr>
+              <a:defRPr sz="1800" b="1">
+                <a:solidFill>
+                  <a:srgbClr val="FFFFFF"/>
+                </a:solidFill>
+                <a:latin typeface="Arial"/>
+              </a:defRPr>
+            </a:pPr>
+            <a:r>
+              <a:t>Especificação 1 — Estação para Hangar &amp; Oficina MRO</a:t>
+            </a:r>
+          </a:p>
+        </p:txBody>
+      </p:sp>
+      <p:sp>
+        <p:nvSpPr>
+          <p:cNvPr id="3" name="TextBox 2"/>
           <p:cNvSpPr txBox="1"/>
           <p:nvPr/>
         </p:nvSpPr>
         <p:spPr>
           <a:xfrm>
-            <a:off x="731520" y="6309360"/>
-            <a:ext cx="10728655" cy="365760"/>
+            <a:off x="457200" y="4800600"/>
+            <a:ext cx="8229600" cy="274320"/>
           </a:xfrm>
           <a:prstGeom prst="rect">
             <a:avLst/>
@@ -5937,7 +6128,7 @@
           <a:noFill/>
         </p:spPr>
         <p:txBody>
-          <a:bodyPr wrap="none" lIns="0" tIns="0" rIns="0" bIns="0">
+          <a:bodyPr wrap="none">
             <a:spAutoFit/>
           </a:bodyPr>
           <a:lstStyle/>
@@ -5945,16 +6136,202 @@
             <a:pPr>
               <a:defRPr sz="900">
                 <a:solidFill>
-                  <a:srgbClr val="64748B"/>
-                </a:solidFill>
-              </a:defRPr>
-            </a:pPr>
-            <a:r>
-              <a:t>Fatec Sorocaba — CST em Manutenção de Aeronaves  |  Prof. André Souza  |  Slide 7 de 11</a:t>
-            </a:r>
-          </a:p>
-        </p:txBody>
-      </p:sp>
+                  <a:srgbClr val="5A5A5A"/>
+                </a:solidFill>
+                <a:latin typeface="Arial"/>
+              </a:defRPr>
+            </a:pPr>
+            <a:r>
+              <a:t>Fatec Sorocaba — CST em Manutenção de Aeronaves  |  Slide 7 de 12</a:t>
+            </a:r>
+          </a:p>
+        </p:txBody>
+      </p:sp>
+      <p:sp>
+        <p:nvSpPr>
+          <p:cNvPr id="4" name="TextBox 3"/>
+          <p:cNvSpPr txBox="1"/>
+          <p:nvPr/>
+        </p:nvSpPr>
+        <p:spPr>
+          <a:xfrm>
+            <a:off x="548640" y="1005840"/>
+            <a:ext cx="4206240" cy="3657600"/>
+          </a:xfrm>
+          <a:prstGeom prst="rect">
+            <a:avLst/>
+          </a:prstGeom>
+          <a:noFill/>
+        </p:spPr>
+        <p:txBody>
+          <a:bodyPr wrap="square">
+            <a:spAutoFit/>
+          </a:bodyPr>
+          <a:lstStyle/>
+          <a:p>
+            <a:pPr>
+              <a:spcBef>
+                <a:spcPts val="0"/>
+              </a:spcBef>
+            </a:pPr>
+            <a:r>
+              <a:rPr b="1" sz="1100">
+                <a:solidFill>
+                  <a:srgbClr val="0F2043"/>
+                </a:solidFill>
+              </a:rPr>
+              <a:t>• CPU:</a:t>
+            </a:r>
+            <a:r>
+              <a:rPr sz="1100">
+                <a:solidFill>
+                  <a:srgbClr val="282828"/>
+                </a:solidFill>
+              </a:rPr>
+              <a:t>  Intel Core i5 / AMD Ryzen 5 (6 Cores / 12 Threads)</a:t>
+            </a:r>
+          </a:p>
+          <a:p>
+            <a:pPr>
+              <a:spcBef>
+                <a:spcPts val="600"/>
+              </a:spcBef>
+            </a:pPr>
+            <a:r>
+              <a:rPr b="1" sz="1100">
+                <a:solidFill>
+                  <a:srgbClr val="0F2043"/>
+                </a:solidFill>
+              </a:rPr>
+              <a:t>• RAM:</a:t>
+            </a:r>
+            <a:r>
+              <a:rPr sz="1100">
+                <a:solidFill>
+                  <a:srgbClr val="282828"/>
+                </a:solidFill>
+              </a:rPr>
+              <a:t>  16 GB DDR4 3200 MHz</a:t>
+            </a:r>
+          </a:p>
+          <a:p>
+            <a:pPr>
+              <a:spcBef>
+                <a:spcPts val="600"/>
+              </a:spcBef>
+            </a:pPr>
+            <a:r>
+              <a:rPr b="1" sz="1100">
+                <a:solidFill>
+                  <a:srgbClr val="0F2043"/>
+                </a:solidFill>
+              </a:rPr>
+              <a:t>• Armazenamento:</a:t>
+            </a:r>
+            <a:r>
+              <a:rPr sz="1100">
+                <a:solidFill>
+                  <a:srgbClr val="282828"/>
+                </a:solidFill>
+              </a:rPr>
+              <a:t>  SSD NVMe M.2 512 GB PCIe 3.0/4.0</a:t>
+            </a:r>
+          </a:p>
+          <a:p>
+            <a:pPr>
+              <a:spcBef>
+                <a:spcPts val="600"/>
+              </a:spcBef>
+            </a:pPr>
+            <a:r>
+              <a:rPr b="1" sz="1100">
+                <a:solidFill>
+                  <a:srgbClr val="0F2043"/>
+                </a:solidFill>
+              </a:rPr>
+              <a:t>• GPU:</a:t>
+            </a:r>
+            <a:r>
+              <a:rPr sz="1100">
+                <a:solidFill>
+                  <a:srgbClr val="282828"/>
+                </a:solidFill>
+              </a:rPr>
+              <a:t>  Vídeo Integrado (Intel Iris Xe / AMD Radeon Vega)</a:t>
+            </a:r>
+          </a:p>
+          <a:p>
+            <a:pPr>
+              <a:spcBef>
+                <a:spcPts val="600"/>
+              </a:spcBef>
+            </a:pPr>
+            <a:r>
+              <a:rPr b="1" sz="1100">
+                <a:solidFill>
+                  <a:srgbClr val="0F2043"/>
+                </a:solidFill>
+              </a:rPr>
+              <a:t>• Monitor:</a:t>
+            </a:r>
+            <a:r>
+              <a:rPr sz="1100">
+                <a:solidFill>
+                  <a:srgbClr val="282828"/>
+                </a:solidFill>
+              </a:rPr>
+              <a:t>  24" Full HD com Tratamento Antirreflexo (*Matte*)</a:t>
+            </a:r>
+          </a:p>
+          <a:p>
+            <a:pPr>
+              <a:spcBef>
+                <a:spcPts val="600"/>
+              </a:spcBef>
+            </a:pPr>
+            <a:r>
+              <a:rPr b="1" sz="1100">
+                <a:solidFill>
+                  <a:srgbClr val="0F2043"/>
+                </a:solidFill>
+              </a:rPr>
+              <a:t>• Justificativa Técnica:</a:t>
+            </a:r>
+            <a:r>
+              <a:rPr sz="1100">
+                <a:solidFill>
+                  <a:srgbClr val="282828"/>
+                </a:solidFill>
+              </a:rPr>
+              <a:t>  Manuais AMM ocupam 2 a 4 GB de RAM ao renderizar PDF vetorial. 16 GB garante alternância fluida com o sistema MRO. O SSD NVMe é resistente a choques mecânicos e vibrações do hangar, carregando o sistema em 5s.</a:t>
+            </a:r>
+          </a:p>
+        </p:txBody>
+      </p:sp>
+      <p:pic>
+        <p:nvPicPr>
+          <p:cNvPr id="5" name="Picture 4" descr="hangar.jpg"/>
+          <p:cNvPicPr>
+            <a:picLocks noChangeAspect="1"/>
+          </p:cNvPicPr>
+          <p:nvPr/>
+        </p:nvPicPr>
+        <p:blipFill>
+          <a:blip r:embed="rId2"/>
+          <a:stretch>
+            <a:fillRect/>
+          </a:stretch>
+        </p:blipFill>
+        <p:spPr>
+          <a:xfrm>
+            <a:off x="4937760" y="1097280"/>
+            <a:ext cx="3657600" cy="3474720"/>
+          </a:xfrm>
+          <a:prstGeom prst="rect">
+            <a:avLst/>
+          </a:prstGeom>
+        </p:spPr>
+      </p:pic>
     </p:spTree>
   </p:cSld>
   <p:clrMapOvr>
@@ -5975,75 +6352,23 @@
       <p:grpSpPr/>
       <p:sp>
         <p:nvSpPr>
-          <p:cNvPr id="2" name="TextBox 1"/>
-          <p:cNvSpPr txBox="1"/>
+          <p:cNvPr id="2" name="Rectangle 1"/>
+          <p:cNvSpPr/>
           <p:nvPr/>
         </p:nvSpPr>
         <p:spPr>
           <a:xfrm>
-            <a:off x="731520" y="365760"/>
-            <a:ext cx="10728655" cy="1005840"/>
+            <a:off x="0" y="0"/>
+            <a:ext cx="9144000" cy="822960"/>
           </a:xfrm>
           <a:prstGeom prst="rect">
             <a:avLst/>
           </a:prstGeom>
-          <a:noFill/>
-        </p:spPr>
-        <p:txBody>
-          <a:bodyPr wrap="square" lIns="0" tIns="0" rIns="0" bIns="0">
-            <a:spAutoFit/>
-          </a:bodyPr>
-          <a:lstStyle/>
-          <a:p>
-            <a:pPr>
-              <a:defRPr sz="1100" b="1">
-                <a:solidFill>
-                  <a:srgbClr val="0284C7"/>
-                </a:solidFill>
-              </a:defRPr>
-            </a:pPr>
-            <a:r>
-              <a:t>INF-117 | INFORMÁTICA APLICADA A AERONÁUTICA</a:t>
-            </a:r>
-          </a:p>
-          <a:p>
-            <a:pPr>
-              <a:spcBef>
-                <a:spcPts val="300"/>
-              </a:spcBef>
-              <a:defRPr sz="2200" b="1">
-                <a:solidFill>
-                  <a:srgbClr val="0F2537"/>
-                </a:solidFill>
-              </a:defRPr>
-            </a:pPr>
-            <a:r>
-              <a:t>Comparativo Síntese: Hangar vs. Engenharia</a:t>
-            </a:r>
-          </a:p>
-        </p:txBody>
-      </p:sp>
-      <p:sp>
-        <p:nvSpPr>
-          <p:cNvPr id="3" name="Rounded Rectangle 2"/>
-          <p:cNvSpPr/>
-          <p:nvPr/>
-        </p:nvSpPr>
-        <p:spPr>
-          <a:xfrm>
-            <a:off x="731520" y="1554480"/>
-            <a:ext cx="5166360" cy="4480560"/>
-          </a:xfrm>
-          <a:prstGeom prst="roundRect">
-            <a:avLst/>
-          </a:prstGeom>
           <a:solidFill>
-            <a:srgbClr val="FFFFFF"/>
+            <a:srgbClr val="0F2043"/>
           </a:solidFill>
-          <a:ln w="12700">
-            <a:solidFill>
-              <a:srgbClr val="CBD5E1"/>
-            </a:solidFill>
+          <a:ln>
+            <a:noFill/>
           </a:ln>
         </p:spPr>
         <p:style>
@@ -6061,78 +6386,68 @@
           </a:fontRef>
         </p:style>
         <p:txBody>
-          <a:bodyPr rtlCol="0" anchor="ctr" wrap="square" lIns="274320" rIns="274320" tIns="274320"/>
+          <a:bodyPr rtlCol="0" anchor="ctr" wrap="square" lIns="457200" tIns="109728"/>
           <a:lstStyle/>
           <a:p>
             <a:pPr algn="ctr">
-              <a:defRPr sz="1600" b="1">
-                <a:solidFill>
-                  <a:srgbClr val="0F2537"/>
-                </a:solidFill>
-              </a:defRPr>
-            </a:pPr>
-            <a:r>
-              <a:t>Perfil 1: Hangar / Linha de Voo</a:t>
-            </a:r>
-          </a:p>
-          <a:p>
-            <a:pPr>
-              <a:spcBef>
-                <a:spcPts val="600"/>
-              </a:spcBef>
-              <a:defRPr sz="1150">
-                <a:solidFill>
-                  <a:srgbClr val="1E293B"/>
-                </a:solidFill>
-              </a:defRPr>
-            </a:pPr>
-            <a:r>
-              <a:t>•  Demanda: Consulta ágil, baixa geração de calor, resistência mecânica.</a:t>
-            </a:r>
-          </a:p>
-          <a:p>
-            <a:pPr>
-              <a:spcBef>
-                <a:spcPts val="600"/>
-              </a:spcBef>
-              <a:defRPr sz="1150">
-                <a:solidFill>
-                  <a:srgbClr val="1E293B"/>
-                </a:solidFill>
-              </a:defRPr>
-            </a:pPr>
-            <a:r>
-              <a:t>•  Softwares: Leitor de PDF, Sistema MRO Web, Excel Essencial, EFB.</a:t>
-            </a:r>
-          </a:p>
-          <a:p>
-            <a:pPr>
-              <a:spcBef>
-                <a:spcPts val="600"/>
-              </a:spcBef>
-              <a:defRPr sz="1150">
-                <a:solidFill>
-                  <a:srgbClr val="1E293B"/>
-                </a:solidFill>
-              </a:defRPr>
-            </a:pPr>
-            <a:r>
-              <a:t>•  Prioridade: Estabilidade, resposta rápida e tela antirreflexo.</a:t>
-            </a:r>
-          </a:p>
-          <a:p>
-            <a:pPr>
-              <a:spcBef>
-                <a:spcPts val="600"/>
-              </a:spcBef>
-              <a:defRPr sz="1150">
-                <a:solidFill>
-                  <a:srgbClr val="1E293B"/>
-                </a:solidFill>
-              </a:defRPr>
-            </a:pPr>
-            <a:r>
-              <a:t>•  Custo-Benefício: Excelente relação custo/desempenho para escala.</a:t>
+              <a:defRPr sz="900" b="1">
+                <a:solidFill>
+                  <a:srgbClr val="0072CE"/>
+                </a:solidFill>
+                <a:latin typeface="Arial"/>
+              </a:defRPr>
+            </a:pPr>
+            <a:r>
+              <a:t>INF-117 — INFORMÁTICA APLICADA A AERONÁUTICA</a:t>
+            </a:r>
+          </a:p>
+          <a:p>
+            <a:pPr>
+              <a:defRPr sz="1800" b="1">
+                <a:solidFill>
+                  <a:srgbClr val="FFFFFF"/>
+                </a:solidFill>
+                <a:latin typeface="Arial"/>
+              </a:defRPr>
+            </a:pPr>
+            <a:r>
+              <a:t>Especificação 2 — Workstation de Engenharia &amp; PCM</a:t>
+            </a:r>
+          </a:p>
+        </p:txBody>
+      </p:sp>
+      <p:sp>
+        <p:nvSpPr>
+          <p:cNvPr id="3" name="TextBox 2"/>
+          <p:cNvSpPr txBox="1"/>
+          <p:nvPr/>
+        </p:nvSpPr>
+        <p:spPr>
+          <a:xfrm>
+            <a:off x="457200" y="4800600"/>
+            <a:ext cx="8229600" cy="274320"/>
+          </a:xfrm>
+          <a:prstGeom prst="rect">
+            <a:avLst/>
+          </a:prstGeom>
+          <a:noFill/>
+        </p:spPr>
+        <p:txBody>
+          <a:bodyPr wrap="none">
+            <a:spAutoFit/>
+          </a:bodyPr>
+          <a:lstStyle/>
+          <a:p>
+            <a:pPr>
+              <a:defRPr sz="900">
+                <a:solidFill>
+                  <a:srgbClr val="5A5A5A"/>
+                </a:solidFill>
+                <a:latin typeface="Arial"/>
+              </a:defRPr>
+            </a:pPr>
+            <a:r>
+              <a:t>Fatec Sorocaba — CST em Manutenção de Aeronaves  |  Slide 8 de 12</a:t>
             </a:r>
           </a:p>
         </p:txBody>
@@ -6145,18 +6460,18 @@
         </p:nvSpPr>
         <p:spPr>
           <a:xfrm>
-            <a:off x="6263640" y="1554480"/>
-            <a:ext cx="5166360" cy="4480560"/>
+            <a:off x="548640" y="1097280"/>
+            <a:ext cx="8046720" cy="3474720"/>
           </a:xfrm>
           <a:prstGeom prst="roundRect">
             <a:avLst/>
           </a:prstGeom>
           <a:solidFill>
-            <a:srgbClr val="FFFFFF"/>
+            <a:srgbClr val="E6F0FA"/>
           </a:solidFill>
-          <a:ln w="12700">
+          <a:ln>
             <a:solidFill>
-              <a:srgbClr val="CBD5E1"/>
+              <a:srgbClr val="D2DCE6"/>
             </a:solidFill>
           </a:ln>
         </p:spPr>
@@ -6175,79 +6490,10 @@
           </a:fontRef>
         </p:style>
         <p:txBody>
-          <a:bodyPr rtlCol="0" anchor="ctr" wrap="square" lIns="274320" rIns="274320" tIns="274320"/>
-          <a:lstStyle/>
-          <a:p>
-            <a:pPr algn="ctr">
-              <a:defRPr sz="1600" b="1">
-                <a:solidFill>
-                  <a:srgbClr val="0284C7"/>
-                </a:solidFill>
-              </a:defRPr>
-            </a:pPr>
-            <a:r>
-              <a:t>Perfil 2: Engenharia / PCM / Confiabilidade</a:t>
-            </a:r>
-          </a:p>
-          <a:p>
-            <a:pPr>
-              <a:spcBef>
-                <a:spcPts val="600"/>
-              </a:spcBef>
-              <a:defRPr sz="1150">
-                <a:solidFill>
-                  <a:srgbClr val="1E293B"/>
-                </a:solidFill>
-              </a:defRPr>
-            </a:pPr>
-            <a:r>
-              <a:t>•  Demanda: Capacidade de processamento analítico massivo e CAD 3D.</a:t>
-            </a:r>
-          </a:p>
-          <a:p>
-            <a:pPr>
-              <a:spcBef>
-                <a:spcPts val="600"/>
-              </a:spcBef>
-              <a:defRPr sz="1150">
-                <a:solidFill>
-                  <a:srgbClr val="1E293B"/>
-                </a:solidFill>
-              </a:defRPr>
-            </a:pPr>
-            <a:r>
-              <a:t>•  Softwares: Excel Avançado, Power BI, AutoCAD/CATIA, MS Project.</a:t>
-            </a:r>
-          </a:p>
-          <a:p>
-            <a:pPr>
-              <a:spcBef>
-                <a:spcPts val="600"/>
-              </a:spcBef>
-              <a:defRPr sz="1150">
-                <a:solidFill>
-                  <a:srgbClr val="1E293B"/>
-                </a:solidFill>
-              </a:defRPr>
-            </a:pPr>
-            <a:r>
-              <a:t>•  Prioridade: Poder de processamento, largura de banda de memória e área visual dupla.</a:t>
-            </a:r>
-          </a:p>
-          <a:p>
-            <a:pPr>
-              <a:spcBef>
-                <a:spcPts val="600"/>
-              </a:spcBef>
-              <a:defRPr sz="1150">
-                <a:solidFill>
-                  <a:srgbClr val="1E293B"/>
-                </a:solidFill>
-              </a:defRPr>
-            </a:pPr>
-            <a:r>
-              <a:t>•  Investimento: Focado em produtividade de alta complexidade.</a:t>
-            </a:r>
+          <a:bodyPr rtlCol="0" anchor="ctr"/>
+          <a:lstStyle/>
+          <a:p>
+            <a:pPr algn="ctr"/>
           </a:p>
         </p:txBody>
       </p:sp>
@@ -6259,8 +6505,8 @@
         </p:nvSpPr>
         <p:spPr>
           <a:xfrm>
-            <a:off x="731520" y="6309360"/>
-            <a:ext cx="10728655" cy="365760"/>
+            <a:off x="731520" y="1188720"/>
+            <a:ext cx="7680960" cy="3291840"/>
           </a:xfrm>
           <a:prstGeom prst="rect">
             <a:avLst/>
@@ -6268,20 +6514,163 @@
           <a:noFill/>
         </p:spPr>
         <p:txBody>
-          <a:bodyPr wrap="none" lIns="0" tIns="0" rIns="0" bIns="0">
+          <a:bodyPr wrap="square">
             <a:spAutoFit/>
           </a:bodyPr>
           <a:lstStyle/>
           <a:p>
             <a:pPr>
-              <a:defRPr sz="900">
-                <a:solidFill>
-                  <a:srgbClr val="64748B"/>
-                </a:solidFill>
-              </a:defRPr>
-            </a:pPr>
-            <a:r>
-              <a:t>Fatec Sorocaba — CST em Manutenção de Aeronaves  |  Prof. André Souza  |  Slide 8 de 11</a:t>
+              <a:spcBef>
+                <a:spcPts val="0"/>
+              </a:spcBef>
+            </a:pPr>
+            <a:r>
+              <a:rPr b="1" sz="1100">
+                <a:solidFill>
+                  <a:srgbClr val="0F2043"/>
+                </a:solidFill>
+              </a:rPr>
+              <a:t>• Processador (CPU):</a:t>
+            </a:r>
+            <a:r>
+              <a:rPr sz="1100" b="1">
+                <a:solidFill>
+                  <a:srgbClr val="0072CE"/>
+                </a:solidFill>
+              </a:rPr>
+              <a:t>  Intel Core i7/i9 ou Ryzen 7/9 (8 a 16 Cores, Clock Boost &gt;= 4.7 GHz)</a:t>
+            </a:r>
+            <a:r>
+              <a:rPr sz="1000">
+                <a:solidFill>
+                  <a:srgbClr val="282828"/>
+                </a:solidFill>
+              </a:rPr>
+              <a:t> —  Alto clock acelerado para CAD paramétrico e múltiplos núcleos para cálculo matricial do Excel.</a:t>
+            </a:r>
+          </a:p>
+          <a:p>
+            <a:pPr>
+              <a:spcBef>
+                <a:spcPts val="600"/>
+              </a:spcBef>
+            </a:pPr>
+            <a:r>
+              <a:rPr b="1" sz="1100">
+                <a:solidFill>
+                  <a:srgbClr val="0F2043"/>
+                </a:solidFill>
+              </a:rPr>
+              <a:t>• Memória RAM:</a:t>
+            </a:r>
+            <a:r>
+              <a:rPr sz="1100" b="1">
+                <a:solidFill>
+                  <a:srgbClr val="0072CE"/>
+                </a:solidFill>
+              </a:rPr>
+              <a:t>  32 GB a 64 GB DDR5 5600 MHz (Dual Channel)</a:t>
+            </a:r>
+            <a:r>
+              <a:rPr sz="1000">
+                <a:solidFill>
+                  <a:srgbClr val="282828"/>
+                </a:solidFill>
+              </a:rPr>
+              <a:t> —  Suporta bases de confiabilidade com 500k+ registros e montagens 3D de mais de 20 GB em RAM.</a:t>
+            </a:r>
+          </a:p>
+          <a:p>
+            <a:pPr>
+              <a:spcBef>
+                <a:spcPts val="600"/>
+              </a:spcBef>
+            </a:pPr>
+            <a:r>
+              <a:rPr b="1" sz="1100">
+                <a:solidFill>
+                  <a:srgbClr val="0F2043"/>
+                </a:solidFill>
+              </a:rPr>
+              <a:t>• Armazenamento:</a:t>
+            </a:r>
+            <a:r>
+              <a:rPr sz="1100" b="1">
+                <a:solidFill>
+                  <a:srgbClr val="0072CE"/>
+                </a:solidFill>
+              </a:rPr>
+              <a:t>  SSD NVMe 1 TB a 2 TB PCIe 4.0 (Leitura &gt;= 7.000 MB/s)</a:t>
+            </a:r>
+            <a:r>
+              <a:rPr sz="1000">
+                <a:solidFill>
+                  <a:srgbClr val="282828"/>
+                </a:solidFill>
+              </a:rPr>
+              <a:t> —  Alta taxa de IOPS reduz o tempo de abertura de projetos CAD complexos de minutos para segundos.</a:t>
+            </a:r>
+          </a:p>
+          <a:p>
+            <a:pPr>
+              <a:spcBef>
+                <a:spcPts val="600"/>
+              </a:spcBef>
+            </a:pPr>
+            <a:r>
+              <a:rPr b="1" sz="1100">
+                <a:solidFill>
+                  <a:srgbClr val="0F2043"/>
+                </a:solidFill>
+              </a:rPr>
+              <a:t>• Placa de Vídeo (GPU):</a:t>
+            </a:r>
+            <a:r>
+              <a:rPr sz="1100" b="1">
+                <a:solidFill>
+                  <a:srgbClr val="0072CE"/>
+                </a:solidFill>
+              </a:rPr>
+              <a:t>  NVIDIA RTX Profissional Dedicada (8 a 12 GB VRAM GDDR6)</a:t>
+            </a:r>
+            <a:r>
+              <a:rPr sz="1000">
+                <a:solidFill>
+                  <a:srgbClr val="282828"/>
+                </a:solidFill>
+              </a:rPr>
+              <a:t> —  Renderização 3D de turbinas em tempo real com drivers de precisão homologados.</a:t>
+            </a:r>
+          </a:p>
+          <a:p>
+            <a:pPr>
+              <a:spcBef>
+                <a:spcPts val="600"/>
+              </a:spcBef>
+            </a:pPr>
+            <a:r>
+              <a:rPr b="1" sz="1100">
+                <a:solidFill>
+                  <a:srgbClr val="0F2043"/>
+                </a:solidFill>
+              </a:rPr>
+              <a:t>• Telas:</a:t>
+            </a:r>
+            <a:r>
+              <a:rPr sz="1100" b="1">
+                <a:solidFill>
+                  <a:srgbClr val="0072CE"/>
+                </a:solidFill>
+              </a:rPr>
+              <a:t>  2 Monitores de 27" IPS QHD (2560x1440) em Braço Articulado</a:t>
+            </a:r>
+            <a:r>
+              <a:rPr sz="1000">
+                <a:solidFill>
+                  <a:srgbClr val="282828"/>
+                </a:solidFill>
+              </a:rPr>
+              <a:t> —  77% mais área visual que 1080p, permitindo exibir manual SRM em uma tela e CAD/Excel na outra.</a:t>
             </a:r>
           </a:p>
         </p:txBody>
@@ -6306,75 +6695,23 @@
       <p:grpSpPr/>
       <p:sp>
         <p:nvSpPr>
-          <p:cNvPr id="2" name="TextBox 1"/>
-          <p:cNvSpPr txBox="1"/>
+          <p:cNvPr id="2" name="Rectangle 1"/>
+          <p:cNvSpPr/>
           <p:nvPr/>
         </p:nvSpPr>
         <p:spPr>
           <a:xfrm>
-            <a:off x="731520" y="365760"/>
-            <a:ext cx="10728655" cy="1005840"/>
+            <a:off x="0" y="0"/>
+            <a:ext cx="9144000" cy="822960"/>
           </a:xfrm>
           <a:prstGeom prst="rect">
             <a:avLst/>
           </a:prstGeom>
-          <a:noFill/>
-        </p:spPr>
-        <p:txBody>
-          <a:bodyPr wrap="square" lIns="0" tIns="0" rIns="0" bIns="0">
-            <a:spAutoFit/>
-          </a:bodyPr>
-          <a:lstStyle/>
-          <a:p>
-            <a:pPr>
-              <a:defRPr sz="1100" b="1">
-                <a:solidFill>
-                  <a:srgbClr val="0284C7"/>
-                </a:solidFill>
-              </a:defRPr>
-            </a:pPr>
-            <a:r>
-              <a:t>INF-117 | INFORMÁTICA APLICADA A AERONÁUTICA</a:t>
-            </a:r>
-          </a:p>
-          <a:p>
-            <a:pPr>
-              <a:spcBef>
-                <a:spcPts val="300"/>
-              </a:spcBef>
-              <a:defRPr sz="2200" b="1">
-                <a:solidFill>
-                  <a:srgbClr val="0F2537"/>
-                </a:solidFill>
-              </a:defRPr>
-            </a:pPr>
-            <a:r>
-              <a:t>Diagnóstico Prático de Hardware no Windows</a:t>
-            </a:r>
-          </a:p>
-        </p:txBody>
-      </p:sp>
-      <p:sp>
-        <p:nvSpPr>
-          <p:cNvPr id="3" name="Rounded Rectangle 2"/>
-          <p:cNvSpPr/>
-          <p:nvPr/>
-        </p:nvSpPr>
-        <p:spPr>
-          <a:xfrm>
-            <a:off x="731520" y="1554480"/>
-            <a:ext cx="5166360" cy="4480560"/>
-          </a:xfrm>
-          <a:prstGeom prst="roundRect">
-            <a:avLst/>
-          </a:prstGeom>
           <a:solidFill>
-            <a:srgbClr val="FFFFFF"/>
+            <a:srgbClr val="0F2043"/>
           </a:solidFill>
-          <a:ln w="12700">
-            <a:solidFill>
-              <a:srgbClr val="CBD5E1"/>
-            </a:solidFill>
+          <a:ln>
+            <a:noFill/>
           </a:ln>
         </p:spPr>
         <p:style>
@@ -6392,206 +6729,46 @@
           </a:fontRef>
         </p:style>
         <p:txBody>
-          <a:bodyPr rtlCol="0" anchor="ctr" wrap="square" lIns="274320" rIns="274320" tIns="274320"/>
+          <a:bodyPr rtlCol="0" anchor="ctr" wrap="square" lIns="457200" tIns="109728"/>
           <a:lstStyle/>
           <a:p>
             <a:pPr algn="ctr">
-              <a:defRPr sz="1600" b="1">
-                <a:solidFill>
-                  <a:srgbClr val="0F2537"/>
-                </a:solidFill>
-              </a:defRPr>
-            </a:pPr>
-            <a:r>
-              <a:t>Ferramentas Nativas do Sistema</a:t>
-            </a:r>
-          </a:p>
-          <a:p>
-            <a:pPr>
-              <a:spcBef>
-                <a:spcPts val="600"/>
-              </a:spcBef>
-              <a:defRPr sz="1150">
-                <a:solidFill>
-                  <a:srgbClr val="1E293B"/>
-                </a:solidFill>
-              </a:defRPr>
-            </a:pPr>
-            <a:r>
-              <a:t>•  Gerenciador de Tarefas (`Ctrl + Shift + Esc`): Monitora o uso em tempo real de CPU, Memória e Disco.</a:t>
-            </a:r>
-          </a:p>
-          <a:p>
-            <a:pPr>
-              <a:spcBef>
-                <a:spcPts val="600"/>
-              </a:spcBef>
-              <a:defRPr sz="1150">
-                <a:solidFill>
-                  <a:srgbClr val="1E293B"/>
-                </a:solidFill>
-              </a:defRPr>
-            </a:pPr>
-            <a:r>
-              <a:t>•  Aba Desempenho: Identifica se há gargalo (disco a 100% ou RAM esgotada).</a:t>
-            </a:r>
-          </a:p>
-          <a:p>
-            <a:pPr>
-              <a:spcBef>
-                <a:spcPts val="600"/>
-              </a:spcBef>
-              <a:defRPr sz="1150">
-                <a:solidFill>
-                  <a:srgbClr val="1E293B"/>
-                </a:solidFill>
-              </a:defRPr>
-            </a:pPr>
-            <a:r>
-              <a:t>•  Informações do Sistema (`Win + Pause/Break` ou `msinfo32`): Exibe modelo exato do processador e BIOS.</a:t>
-            </a:r>
-          </a:p>
-          <a:p>
-            <a:pPr>
-              <a:spcBef>
-                <a:spcPts val="600"/>
-              </a:spcBef>
-              <a:defRPr sz="1150">
-                <a:solidFill>
-                  <a:srgbClr val="1E293B"/>
-                </a:solidFill>
-              </a:defRPr>
-            </a:pPr>
-            <a:r>
-              <a:t>•  Gerenciador de Dispositivos (`devmgmt.msc`): Verifica drivers instalados e portas ativas.</a:t>
-            </a:r>
-          </a:p>
-        </p:txBody>
-      </p:sp>
-      <p:sp>
-        <p:nvSpPr>
-          <p:cNvPr id="4" name="Rounded Rectangle 3"/>
-          <p:cNvSpPr/>
-          <p:nvPr/>
-        </p:nvSpPr>
-        <p:spPr>
-          <a:xfrm>
-            <a:off x="6263640" y="1554480"/>
-            <a:ext cx="5166360" cy="4480560"/>
-          </a:xfrm>
-          <a:prstGeom prst="roundRect">
-            <a:avLst/>
-          </a:prstGeom>
-          <a:solidFill>
-            <a:srgbClr val="FFFFFF"/>
-          </a:solidFill>
-          <a:ln w="12700">
-            <a:solidFill>
-              <a:srgbClr val="CBD5E1"/>
-            </a:solidFill>
-          </a:ln>
-        </p:spPr>
-        <p:style>
-          <a:lnRef idx="1">
-            <a:schemeClr val="accent1"/>
-          </a:lnRef>
-          <a:fillRef idx="3">
-            <a:schemeClr val="accent1"/>
-          </a:fillRef>
-          <a:effectRef idx="2">
-            <a:schemeClr val="accent1"/>
-          </a:effectRef>
-          <a:fontRef idx="minor">
-            <a:schemeClr val="lt1"/>
-          </a:fontRef>
-        </p:style>
-        <p:txBody>
-          <a:bodyPr rtlCol="0" anchor="ctr" wrap="square" lIns="274320" rIns="274320" tIns="274320"/>
-          <a:lstStyle/>
-          <a:p>
-            <a:pPr algn="ctr">
-              <a:defRPr sz="1600" b="1">
-                <a:solidFill>
-                  <a:srgbClr val="0284C7"/>
-                </a:solidFill>
-              </a:defRPr>
-            </a:pPr>
-            <a:r>
-              <a:t>Boas Práticas de Manutenção Digital</a:t>
-            </a:r>
-          </a:p>
-          <a:p>
-            <a:pPr>
-              <a:spcBef>
-                <a:spcPts val="600"/>
-              </a:spcBef>
-              <a:defRPr sz="1150">
-                <a:solidFill>
-                  <a:srgbClr val="1E293B"/>
-                </a:solidFill>
-              </a:defRPr>
-            </a:pPr>
-            <a:r>
-              <a:t>•  Monitorar temperatura de operação em ambientes de hangar.</a:t>
-            </a:r>
-          </a:p>
-          <a:p>
-            <a:pPr>
-              <a:spcBef>
-                <a:spcPts val="600"/>
-              </a:spcBef>
-              <a:defRPr sz="1150">
-                <a:solidFill>
-                  <a:srgbClr val="1E293B"/>
-                </a:solidFill>
-              </a:defRPr>
-            </a:pPr>
-            <a:r>
-              <a:t>•  Manter backups regulares de dados críticos em nuvem corporativa (OneDrive/SharePoint).</a:t>
-            </a:r>
-          </a:p>
-          <a:p>
-            <a:pPr>
-              <a:spcBef>
-                <a:spcPts val="600"/>
-              </a:spcBef>
-              <a:defRPr sz="1150">
-                <a:solidFill>
-                  <a:srgbClr val="1E293B"/>
-                </a:solidFill>
-              </a:defRPr>
-            </a:pPr>
-            <a:r>
-              <a:t>•  Evitar acúmulo de poeira e detritos nas entradas de ar do computador.</a:t>
-            </a:r>
-          </a:p>
-          <a:p>
-            <a:pPr>
-              <a:spcBef>
-                <a:spcPts val="600"/>
-              </a:spcBef>
-              <a:defRPr sz="1150">
-                <a:solidFill>
-                  <a:srgbClr val="1E293B"/>
-                </a:solidFill>
-              </a:defRPr>
-            </a:pPr>
-            <a:r>
-              <a:t>•  Sempre utilizar nobreaks senoidais para proteger estações de teste contra oscilações de energia.</a:t>
-            </a:r>
-          </a:p>
-        </p:txBody>
-      </p:sp>
-      <p:sp>
-        <p:nvSpPr>
-          <p:cNvPr id="5" name="TextBox 4"/>
+              <a:defRPr sz="900" b="1">
+                <a:solidFill>
+                  <a:srgbClr val="0072CE"/>
+                </a:solidFill>
+                <a:latin typeface="Arial"/>
+              </a:defRPr>
+            </a:pPr>
+            <a:r>
+              <a:t>INF-117 — INFORMÁTICA APLICADA A AERONÁUTICA</a:t>
+            </a:r>
+          </a:p>
+          <a:p>
+            <a:pPr>
+              <a:defRPr sz="1800" b="1">
+                <a:solidFill>
+                  <a:srgbClr val="FFFFFF"/>
+                </a:solidFill>
+                <a:latin typeface="Arial"/>
+              </a:defRPr>
+            </a:pPr>
+            <a:r>
+              <a:t>Tópico Especial — Computação Quântica na Aviação (Pergunta dos Alunos)</a:t>
+            </a:r>
+          </a:p>
+        </p:txBody>
+      </p:sp>
+      <p:sp>
+        <p:nvSpPr>
+          <p:cNvPr id="3" name="TextBox 2"/>
           <p:cNvSpPr txBox="1"/>
           <p:nvPr/>
         </p:nvSpPr>
         <p:spPr>
           <a:xfrm>
-            <a:off x="731520" y="6309360"/>
-            <a:ext cx="10728655" cy="365760"/>
+            <a:off x="457200" y="4800600"/>
+            <a:ext cx="8229600" cy="274320"/>
           </a:xfrm>
           <a:prstGeom prst="rect">
             <a:avLst/>
@@ -6599,7 +6776,7 @@
           <a:noFill/>
         </p:spPr>
         <p:txBody>
-          <a:bodyPr wrap="none" lIns="0" tIns="0" rIns="0" bIns="0">
+          <a:bodyPr wrap="none">
             <a:spAutoFit/>
           </a:bodyPr>
           <a:lstStyle/>
@@ -6607,16 +6784,179 @@
             <a:pPr>
               <a:defRPr sz="900">
                 <a:solidFill>
-                  <a:srgbClr val="64748B"/>
-                </a:solidFill>
-              </a:defRPr>
-            </a:pPr>
-            <a:r>
-              <a:t>Fatec Sorocaba — CST em Manutenção de Aeronaves  |  Prof. André Souza  |  Slide 9 de 11</a:t>
-            </a:r>
-          </a:p>
-        </p:txBody>
-      </p:sp>
+                  <a:srgbClr val="5A5A5A"/>
+                </a:solidFill>
+                <a:latin typeface="Arial"/>
+              </a:defRPr>
+            </a:pPr>
+            <a:r>
+              <a:t>Fatec Sorocaba — CST em Manutenção de Aeronaves  |  Slide 9 de 12</a:t>
+            </a:r>
+          </a:p>
+        </p:txBody>
+      </p:sp>
+      <p:sp>
+        <p:nvSpPr>
+          <p:cNvPr id="4" name="TextBox 3"/>
+          <p:cNvSpPr txBox="1"/>
+          <p:nvPr/>
+        </p:nvSpPr>
+        <p:spPr>
+          <a:xfrm>
+            <a:off x="548640" y="1005840"/>
+            <a:ext cx="4206240" cy="3657600"/>
+          </a:xfrm>
+          <a:prstGeom prst="rect">
+            <a:avLst/>
+          </a:prstGeom>
+          <a:noFill/>
+        </p:spPr>
+        <p:txBody>
+          <a:bodyPr wrap="square">
+            <a:spAutoFit/>
+          </a:bodyPr>
+          <a:lstStyle/>
+          <a:p>
+            <a:pPr>
+              <a:spcBef>
+                <a:spcPts val="0"/>
+              </a:spcBef>
+            </a:pPr>
+            <a:r>
+              <a:rPr b="1" sz="1100">
+                <a:solidFill>
+                  <a:srgbClr val="0F2043"/>
+                </a:solidFill>
+              </a:rPr>
+              <a:t>• O que é o Qubit?</a:t>
+            </a:r>
+            <a:r>
+              <a:rPr sz="1100">
+                <a:solidFill>
+                  <a:srgbClr val="282828"/>
+                </a:solidFill>
+              </a:rPr>
+              <a:t>  Ao contrário do bit clássico (0 ou 1), o *qubit* utiliza princípios quânticos como **Superposição** (0 e 1 simultaneamente) e **Emaranhamento**.</a:t>
+            </a:r>
+          </a:p>
+          <a:p>
+            <a:pPr>
+              <a:spcBef>
+                <a:spcPts val="600"/>
+              </a:spcBef>
+            </a:pPr>
+            <a:r>
+              <a:rPr b="1" sz="1100">
+                <a:solidFill>
+                  <a:srgbClr val="0F2043"/>
+                </a:solidFill>
+              </a:rPr>
+              <a:t>• Aplicações na Aviação:</a:t>
+            </a:r>
+            <a:r>
+              <a:rPr sz="1100">
+                <a:solidFill>
+                  <a:srgbClr val="282828"/>
+                </a:solidFill>
+              </a:rPr>
+              <a:t>  Otimização combinatória extrema de malhas aéreas e rotas em tempo real considerando ventos, tráfego e combustível.</a:t>
+            </a:r>
+          </a:p>
+          <a:p>
+            <a:pPr>
+              <a:spcBef>
+                <a:spcPts val="600"/>
+              </a:spcBef>
+            </a:pPr>
+            <a:r>
+              <a:rPr b="1" sz="1100">
+                <a:solidFill>
+                  <a:srgbClr val="0F2043"/>
+                </a:solidFill>
+              </a:rPr>
+              <a:t>• Ciência de Materiais Aeronáuticos:</a:t>
+            </a:r>
+            <a:r>
+              <a:rPr sz="1100">
+                <a:solidFill>
+                  <a:srgbClr val="282828"/>
+                </a:solidFill>
+              </a:rPr>
+              <a:t>  Simulação molecular de novas ligas metálicas mais leves e compósitos resistentes a altíssimas temperaturas.</a:t>
+            </a:r>
+          </a:p>
+          <a:p>
+            <a:pPr>
+              <a:spcBef>
+                <a:spcPts val="600"/>
+              </a:spcBef>
+            </a:pPr>
+            <a:r>
+              <a:rPr b="1" sz="1100">
+                <a:solidFill>
+                  <a:srgbClr val="0F2043"/>
+                </a:solidFill>
+              </a:rPr>
+              <a:t>• Manutenção Preditiva Global:</a:t>
+            </a:r>
+            <a:r>
+              <a:rPr sz="1100">
+                <a:solidFill>
+                  <a:srgbClr val="282828"/>
+                </a:solidFill>
+              </a:rPr>
+              <a:t>  Alocação ideal de frotas e cronogramas de revisão (*Fleet Scheduling &amp; Maintenance Alignment*).</a:t>
+            </a:r>
+          </a:p>
+          <a:p>
+            <a:pPr>
+              <a:spcBef>
+                <a:spcPts val="600"/>
+              </a:spcBef>
+            </a:pPr>
+            <a:r>
+              <a:rPr b="1" sz="1100">
+                <a:solidFill>
+                  <a:srgbClr val="0F2043"/>
+                </a:solidFill>
+              </a:rPr>
+              <a:t>• Quântico vs. Clássico:</a:t>
+            </a:r>
+            <a:r>
+              <a:rPr sz="1100">
+                <a:solidFill>
+                  <a:srgbClr val="282828"/>
+                </a:solidFill>
+              </a:rPr>
+              <a:t>  A computação quântica **não substitui** computadores pessoais ou workstations de hangar; ela atua como supercomputador acelerador em nuvem para cálculos massivos.</a:t>
+            </a:r>
+          </a:p>
+        </p:txBody>
+      </p:sp>
+      <p:pic>
+        <p:nvPicPr>
+          <p:cNvPr id="5" name="Picture 4" descr="quantum.jpg"/>
+          <p:cNvPicPr>
+            <a:picLocks noChangeAspect="1"/>
+          </p:cNvPicPr>
+          <p:nvPr/>
+        </p:nvPicPr>
+        <p:blipFill>
+          <a:blip r:embed="rId2"/>
+          <a:stretch>
+            <a:fillRect/>
+          </a:stretch>
+        </p:blipFill>
+        <p:spPr>
+          <a:xfrm>
+            <a:off x="4937760" y="1097280"/>
+            <a:ext cx="3657600" cy="3474720"/>
+          </a:xfrm>
+          <a:prstGeom prst="rect">
+            <a:avLst/>
+          </a:prstGeom>
+        </p:spPr>
+      </p:pic>
     </p:spTree>
   </p:cSld>
   <p:clrMapOvr>
